--- a/slides/0x400/0x401 - Reverse Engineering SW.pptx
+++ b/slides/0x400/0x401 - Reverse Engineering SW.pptx
@@ -10,6 +10,27 @@
     <p:sldId id="260" r:id="rId4"/>
     <p:sldId id="262" r:id="rId5"/>
     <p:sldId id="261" r:id="rId6"/>
+    <p:sldId id="257" r:id="rId7"/>
+    <p:sldId id="258" r:id="rId8"/>
+    <p:sldId id="263" r:id="rId9"/>
+    <p:sldId id="264" r:id="rId10"/>
+    <p:sldId id="265" r:id="rId11"/>
+    <p:sldId id="266" r:id="rId12"/>
+    <p:sldId id="267" r:id="rId13"/>
+    <p:sldId id="268" r:id="rId14"/>
+    <p:sldId id="269" r:id="rId15"/>
+    <p:sldId id="270" r:id="rId16"/>
+    <p:sldId id="271" r:id="rId17"/>
+    <p:sldId id="272" r:id="rId18"/>
+    <p:sldId id="273" r:id="rId19"/>
+    <p:sldId id="274" r:id="rId20"/>
+    <p:sldId id="275" r:id="rId21"/>
+    <p:sldId id="276" r:id="rId22"/>
+    <p:sldId id="277" r:id="rId23"/>
+    <p:sldId id="278" r:id="rId24"/>
+    <p:sldId id="279" r:id="rId25"/>
+    <p:sldId id="280" r:id="rId26"/>
+    <p:sldId id="281" r:id="rId27"/>
   </p:sldIdLst>
   <p:sldSz cx="12192000" cy="6858000"/>
   <p:notesSz cx="6858000" cy="9144000"/>
@@ -265,7 +286,7 @@
           <a:p>
             <a:fld id="{284D57D4-96EB-485F-885D-A03F9F5EA4CF}" type="datetimeFigureOut">
               <a:rPr lang="en-CA" smtClean="0"/>
-              <a:t>2023-10-23</a:t>
+              <a:t>2026-02-24</a:t>
             </a:fld>
             <a:endParaRPr lang="en-CA"/>
           </a:p>
@@ -465,7 +486,7 @@
           <a:p>
             <a:fld id="{284D57D4-96EB-485F-885D-A03F9F5EA4CF}" type="datetimeFigureOut">
               <a:rPr lang="en-CA" smtClean="0"/>
-              <a:t>2023-10-23</a:t>
+              <a:t>2026-02-24</a:t>
             </a:fld>
             <a:endParaRPr lang="en-CA"/>
           </a:p>
@@ -675,7 +696,7 @@
           <a:p>
             <a:fld id="{284D57D4-96EB-485F-885D-A03F9F5EA4CF}" type="datetimeFigureOut">
               <a:rPr lang="en-CA" smtClean="0"/>
-              <a:t>2023-10-23</a:t>
+              <a:t>2026-02-24</a:t>
             </a:fld>
             <a:endParaRPr lang="en-CA"/>
           </a:p>
@@ -875,7 +896,7 @@
           <a:p>
             <a:fld id="{284D57D4-96EB-485F-885D-A03F9F5EA4CF}" type="datetimeFigureOut">
               <a:rPr lang="en-CA" smtClean="0"/>
-              <a:t>2023-10-23</a:t>
+              <a:t>2026-02-24</a:t>
             </a:fld>
             <a:endParaRPr lang="en-CA"/>
           </a:p>
@@ -1151,7 +1172,7 @@
           <a:p>
             <a:fld id="{284D57D4-96EB-485F-885D-A03F9F5EA4CF}" type="datetimeFigureOut">
               <a:rPr lang="en-CA" smtClean="0"/>
-              <a:t>2023-10-23</a:t>
+              <a:t>2026-02-24</a:t>
             </a:fld>
             <a:endParaRPr lang="en-CA"/>
           </a:p>
@@ -1419,7 +1440,7 @@
           <a:p>
             <a:fld id="{284D57D4-96EB-485F-885D-A03F9F5EA4CF}" type="datetimeFigureOut">
               <a:rPr lang="en-CA" smtClean="0"/>
-              <a:t>2023-10-23</a:t>
+              <a:t>2026-02-24</a:t>
             </a:fld>
             <a:endParaRPr lang="en-CA"/>
           </a:p>
@@ -1834,7 +1855,7 @@
           <a:p>
             <a:fld id="{284D57D4-96EB-485F-885D-A03F9F5EA4CF}" type="datetimeFigureOut">
               <a:rPr lang="en-CA" smtClean="0"/>
-              <a:t>2023-10-23</a:t>
+              <a:t>2026-02-24</a:t>
             </a:fld>
             <a:endParaRPr lang="en-CA"/>
           </a:p>
@@ -1976,7 +1997,7 @@
           <a:p>
             <a:fld id="{284D57D4-96EB-485F-885D-A03F9F5EA4CF}" type="datetimeFigureOut">
               <a:rPr lang="en-CA" smtClean="0"/>
-              <a:t>2023-10-23</a:t>
+              <a:t>2026-02-24</a:t>
             </a:fld>
             <a:endParaRPr lang="en-CA"/>
           </a:p>
@@ -2089,7 +2110,7 @@
           <a:p>
             <a:fld id="{284D57D4-96EB-485F-885D-A03F9F5EA4CF}" type="datetimeFigureOut">
               <a:rPr lang="en-CA" smtClean="0"/>
-              <a:t>2023-10-23</a:t>
+              <a:t>2026-02-24</a:t>
             </a:fld>
             <a:endParaRPr lang="en-CA"/>
           </a:p>
@@ -2402,7 +2423,7 @@
           <a:p>
             <a:fld id="{284D57D4-96EB-485F-885D-A03F9F5EA4CF}" type="datetimeFigureOut">
               <a:rPr lang="en-CA" smtClean="0"/>
-              <a:t>2023-10-23</a:t>
+              <a:t>2026-02-24</a:t>
             </a:fld>
             <a:endParaRPr lang="en-CA"/>
           </a:p>
@@ -2691,7 +2712,7 @@
           <a:p>
             <a:fld id="{284D57D4-96EB-485F-885D-A03F9F5EA4CF}" type="datetimeFigureOut">
               <a:rPr lang="en-CA" smtClean="0"/>
-              <a:t>2023-10-23</a:t>
+              <a:t>2026-02-24</a:t>
             </a:fld>
             <a:endParaRPr lang="en-CA"/>
           </a:p>
@@ -2934,7 +2955,7 @@
           <a:p>
             <a:fld id="{284D57D4-96EB-485F-885D-A03F9F5EA4CF}" type="datetimeFigureOut">
               <a:rPr lang="en-CA" smtClean="0"/>
-              <a:t>2023-10-23</a:t>
+              <a:t>2026-02-24</a:t>
             </a:fld>
             <a:endParaRPr lang="en-CA"/>
           </a:p>
@@ -3374,7 +3395,7 @@
           <a:p>
             <a:r>
               <a:rPr lang="en-US" dirty="0"/>
-              <a:t>0x401 – Reverse Engineering</a:t>
+              <a:t>0x401 – SW Reverse Engineering Basics</a:t>
             </a:r>
             <a:endParaRPr lang="en-CA" dirty="0"/>
           </a:p>
@@ -3433,6 +3454,1959 @@
     <p:extLst>
       <p:ext uri="{BB962C8B-B14F-4D97-AF65-F5344CB8AC3E}">
         <p14:creationId xmlns:p14="http://schemas.microsoft.com/office/powerpoint/2010/main" val="2536114999"/>
+      </p:ext>
+    </p:extLst>
+  </p:cSld>
+  <p:clrMapOvr>
+    <a:masterClrMapping/>
+  </p:clrMapOvr>
+</p:sld>
+</file>
+
+<file path=ppt/slides/slide10.xml><?xml version="1.0" encoding="utf-8"?>
+<p:sld xmlns:a="http://schemas.openxmlformats.org/drawingml/2006/main" xmlns:r="http://schemas.openxmlformats.org/officeDocument/2006/relationships" xmlns:p="http://schemas.openxmlformats.org/presentationml/2006/main">
+  <p:cSld>
+    <p:spTree>
+      <p:nvGrpSpPr>
+        <p:cNvPr id="1" name=""/>
+        <p:cNvGrpSpPr/>
+        <p:nvPr/>
+      </p:nvGrpSpPr>
+      <p:grpSpPr>
+        <a:xfrm>
+          <a:off x="0" y="0"/>
+          <a:ext cx="0" cy="0"/>
+          <a:chOff x="0" y="0"/>
+          <a:chExt cx="0" cy="0"/>
+        </a:xfrm>
+      </p:grpSpPr>
+      <p:sp>
+        <p:nvSpPr>
+          <p:cNvPr id="2" name="Title 1">
+            <a:extLst>
+              <a:ext uri="{FF2B5EF4-FFF2-40B4-BE49-F238E27FC236}">
+                <a16:creationId xmlns:a16="http://schemas.microsoft.com/office/drawing/2014/main" id="{013EF7E3-20E7-4881-8CAA-E4B175C5A8CE}"/>
+              </a:ext>
+            </a:extLst>
+          </p:cNvPr>
+          <p:cNvSpPr>
+            <a:spLocks noGrp="1"/>
+          </p:cNvSpPr>
+          <p:nvPr>
+            <p:ph type="title"/>
+          </p:nvPr>
+        </p:nvSpPr>
+        <p:spPr/>
+        <p:txBody>
+          <a:bodyPr/>
+          <a:lstStyle/>
+          <a:p>
+            <a:r>
+              <a:rPr lang="en-US" dirty="0"/>
+              <a:t>Try the following codes:</a:t>
+            </a:r>
+            <a:endParaRPr lang="en-CA" dirty="0"/>
+          </a:p>
+        </p:txBody>
+      </p:sp>
+      <p:sp>
+        <p:nvSpPr>
+          <p:cNvPr id="3" name="Content Placeholder 2">
+            <a:extLst>
+              <a:ext uri="{FF2B5EF4-FFF2-40B4-BE49-F238E27FC236}">
+                <a16:creationId xmlns:a16="http://schemas.microsoft.com/office/drawing/2014/main" id="{FD6273E1-1478-4D68-A2C9-9562F4AADDEF}"/>
+              </a:ext>
+            </a:extLst>
+          </p:cNvPr>
+          <p:cNvSpPr>
+            <a:spLocks noGrp="1"/>
+          </p:cNvSpPr>
+          <p:nvPr>
+            <p:ph idx="1"/>
+          </p:nvPr>
+        </p:nvSpPr>
+        <p:spPr/>
+        <p:txBody>
+          <a:bodyPr/>
+          <a:lstStyle/>
+          <a:p>
+            <a:r>
+              <a:rPr lang="en-US" dirty="0"/>
+              <a:t>A “for” loop</a:t>
+            </a:r>
+          </a:p>
+          <a:p>
+            <a:r>
+              <a:rPr lang="en-US" dirty="0"/>
+              <a:t>Addition operations</a:t>
+            </a:r>
+          </a:p>
+          <a:p>
+            <a:r>
+              <a:rPr lang="en-CA" dirty="0"/>
+              <a:t>Multiply operations</a:t>
+            </a:r>
+          </a:p>
+          <a:p>
+            <a:r>
+              <a:rPr lang="en-CA" dirty="0"/>
+              <a:t>Calling other functions</a:t>
+            </a:r>
+          </a:p>
+        </p:txBody>
+      </p:sp>
+    </p:spTree>
+    <p:extLst>
+      <p:ext uri="{BB962C8B-B14F-4D97-AF65-F5344CB8AC3E}">
+        <p14:creationId xmlns:p14="http://schemas.microsoft.com/office/powerpoint/2010/main" val="1051620044"/>
+      </p:ext>
+    </p:extLst>
+  </p:cSld>
+  <p:clrMapOvr>
+    <a:masterClrMapping/>
+  </p:clrMapOvr>
+</p:sld>
+</file>
+
+<file path=ppt/slides/slide11.xml><?xml version="1.0" encoding="utf-8"?>
+<p:sld xmlns:a="http://schemas.openxmlformats.org/drawingml/2006/main" xmlns:r="http://schemas.openxmlformats.org/officeDocument/2006/relationships" xmlns:p="http://schemas.openxmlformats.org/presentationml/2006/main">
+  <p:cSld>
+    <p:spTree>
+      <p:nvGrpSpPr>
+        <p:cNvPr id="1" name=""/>
+        <p:cNvGrpSpPr/>
+        <p:nvPr/>
+      </p:nvGrpSpPr>
+      <p:grpSpPr>
+        <a:xfrm>
+          <a:off x="0" y="0"/>
+          <a:ext cx="0" cy="0"/>
+          <a:chOff x="0" y="0"/>
+          <a:chExt cx="0" cy="0"/>
+        </a:xfrm>
+      </p:grpSpPr>
+      <p:sp>
+        <p:nvSpPr>
+          <p:cNvPr id="2" name="Title 1">
+            <a:extLst>
+              <a:ext uri="{FF2B5EF4-FFF2-40B4-BE49-F238E27FC236}">
+                <a16:creationId xmlns:a16="http://schemas.microsoft.com/office/drawing/2014/main" id="{D3260C99-A099-4122-98C0-8CC19648F303}"/>
+              </a:ext>
+            </a:extLst>
+          </p:cNvPr>
+          <p:cNvSpPr>
+            <a:spLocks noGrp="1"/>
+          </p:cNvSpPr>
+          <p:nvPr>
+            <p:ph type="title"/>
+          </p:nvPr>
+        </p:nvSpPr>
+        <p:spPr/>
+        <p:txBody>
+          <a:bodyPr/>
+          <a:lstStyle/>
+          <a:p>
+            <a:r>
+              <a:rPr lang="en-US" dirty="0"/>
+              <a:t>Example: Calling other functions</a:t>
+            </a:r>
+            <a:endParaRPr lang="en-CA" dirty="0"/>
+          </a:p>
+        </p:txBody>
+      </p:sp>
+      <p:pic>
+        <p:nvPicPr>
+          <p:cNvPr id="4" name="Content Placeholder 3">
+            <a:extLst>
+              <a:ext uri="{FF2B5EF4-FFF2-40B4-BE49-F238E27FC236}">
+                <a16:creationId xmlns:a16="http://schemas.microsoft.com/office/drawing/2014/main" id="{633EEEE8-FB3D-41FD-8E42-BC473B5A25D0}"/>
+              </a:ext>
+            </a:extLst>
+          </p:cNvPr>
+          <p:cNvPicPr>
+            <a:picLocks noGrp="1" noChangeAspect="1"/>
+          </p:cNvPicPr>
+          <p:nvPr>
+            <p:ph idx="1"/>
+          </p:nvPr>
+        </p:nvPicPr>
+        <p:blipFill>
+          <a:blip r:embed="rId2"/>
+          <a:stretch>
+            <a:fillRect/>
+          </a:stretch>
+        </p:blipFill>
+        <p:spPr>
+          <a:xfrm>
+            <a:off x="962755" y="1601477"/>
+            <a:ext cx="9761493" cy="4955439"/>
+          </a:xfrm>
+          <a:prstGeom prst="rect">
+            <a:avLst/>
+          </a:prstGeom>
+        </p:spPr>
+      </p:pic>
+    </p:spTree>
+    <p:extLst>
+      <p:ext uri="{BB962C8B-B14F-4D97-AF65-F5344CB8AC3E}">
+        <p14:creationId xmlns:p14="http://schemas.microsoft.com/office/powerpoint/2010/main" val="2990626810"/>
+      </p:ext>
+    </p:extLst>
+  </p:cSld>
+  <p:clrMapOvr>
+    <a:masterClrMapping/>
+  </p:clrMapOvr>
+</p:sld>
+</file>
+
+<file path=ppt/slides/slide12.xml><?xml version="1.0" encoding="utf-8"?>
+<p:sld xmlns:a="http://schemas.openxmlformats.org/drawingml/2006/main" xmlns:r="http://schemas.openxmlformats.org/officeDocument/2006/relationships" xmlns:p="http://schemas.openxmlformats.org/presentationml/2006/main">
+  <p:cSld>
+    <p:spTree>
+      <p:nvGrpSpPr>
+        <p:cNvPr id="1" name=""/>
+        <p:cNvGrpSpPr/>
+        <p:nvPr/>
+      </p:nvGrpSpPr>
+      <p:grpSpPr>
+        <a:xfrm>
+          <a:off x="0" y="0"/>
+          <a:ext cx="0" cy="0"/>
+          <a:chOff x="0" y="0"/>
+          <a:chExt cx="0" cy="0"/>
+        </a:xfrm>
+      </p:grpSpPr>
+      <p:sp>
+        <p:nvSpPr>
+          <p:cNvPr id="2" name="Title 1">
+            <a:extLst>
+              <a:ext uri="{FF2B5EF4-FFF2-40B4-BE49-F238E27FC236}">
+                <a16:creationId xmlns:a16="http://schemas.microsoft.com/office/drawing/2014/main" id="{501256DA-8AA1-4BB9-857D-1399DECD444F}"/>
+              </a:ext>
+            </a:extLst>
+          </p:cNvPr>
+          <p:cNvSpPr>
+            <a:spLocks noGrp="1"/>
+          </p:cNvSpPr>
+          <p:nvPr>
+            <p:ph type="title"/>
+          </p:nvPr>
+        </p:nvSpPr>
+        <p:spPr/>
+        <p:txBody>
+          <a:bodyPr/>
+          <a:lstStyle/>
+          <a:p>
+            <a:r>
+              <a:rPr lang="en-US" dirty="0"/>
+              <a:t>Questions for Quiz – use Compiler Explorer to answer the following…</a:t>
+            </a:r>
+            <a:endParaRPr lang="en-CA" dirty="0"/>
+          </a:p>
+        </p:txBody>
+      </p:sp>
+      <p:sp>
+        <p:nvSpPr>
+          <p:cNvPr id="3" name="Content Placeholder 2">
+            <a:extLst>
+              <a:ext uri="{FF2B5EF4-FFF2-40B4-BE49-F238E27FC236}">
+                <a16:creationId xmlns:a16="http://schemas.microsoft.com/office/drawing/2014/main" id="{CBFA4F88-1A75-41C9-89E2-A702FC41A1B8}"/>
+              </a:ext>
+            </a:extLst>
+          </p:cNvPr>
+          <p:cNvSpPr>
+            <a:spLocks noGrp="1"/>
+          </p:cNvSpPr>
+          <p:nvPr>
+            <p:ph idx="1"/>
+          </p:nvPr>
+        </p:nvSpPr>
+        <p:spPr/>
+        <p:txBody>
+          <a:bodyPr/>
+          <a:lstStyle/>
+          <a:p>
+            <a:r>
+              <a:rPr lang="en-US" dirty="0"/>
+              <a:t>What is the assembly instruction for addition of numbers?</a:t>
+            </a:r>
+          </a:p>
+          <a:p>
+            <a:endParaRPr lang="en-US" dirty="0"/>
+          </a:p>
+          <a:p>
+            <a:endParaRPr lang="en-US" dirty="0"/>
+          </a:p>
+          <a:p>
+            <a:endParaRPr lang="en-US" dirty="0"/>
+          </a:p>
+          <a:p>
+            <a:endParaRPr lang="en-US" dirty="0"/>
+          </a:p>
+          <a:p>
+            <a:r>
+              <a:rPr lang="en-US" dirty="0"/>
+              <a:t>When calling a C function, where does:</a:t>
+            </a:r>
+          </a:p>
+          <a:p>
+            <a:pPr lvl="1"/>
+            <a:r>
+              <a:rPr lang="en-US" dirty="0"/>
+              <a:t>The first argument go?</a:t>
+            </a:r>
+          </a:p>
+          <a:p>
+            <a:pPr lvl="1"/>
+            <a:r>
+              <a:rPr lang="en-US" dirty="0"/>
+              <a:t>The second argument go?</a:t>
+            </a:r>
+          </a:p>
+          <a:p>
+            <a:pPr lvl="1"/>
+            <a:r>
+              <a:rPr lang="en-US" dirty="0"/>
+              <a:t>When does it stop using this method?</a:t>
+            </a:r>
+            <a:endParaRPr lang="en-CA" dirty="0"/>
+          </a:p>
+        </p:txBody>
+      </p:sp>
+      <p:pic>
+        <p:nvPicPr>
+          <p:cNvPr id="4" name="Picture 3">
+            <a:extLst>
+              <a:ext uri="{FF2B5EF4-FFF2-40B4-BE49-F238E27FC236}">
+                <a16:creationId xmlns:a16="http://schemas.microsoft.com/office/drawing/2014/main" id="{A20B6F6D-C264-4A09-82FB-7B8937805871}"/>
+              </a:ext>
+            </a:extLst>
+          </p:cNvPr>
+          <p:cNvPicPr>
+            <a:picLocks noChangeAspect="1"/>
+          </p:cNvPicPr>
+          <p:nvPr/>
+        </p:nvPicPr>
+        <p:blipFill>
+          <a:blip r:embed="rId2"/>
+          <a:stretch>
+            <a:fillRect/>
+          </a:stretch>
+        </p:blipFill>
+        <p:spPr>
+          <a:xfrm>
+            <a:off x="7238560" y="2480998"/>
+            <a:ext cx="3741676" cy="1713979"/>
+          </a:xfrm>
+          <a:prstGeom prst="rect">
+            <a:avLst/>
+          </a:prstGeom>
+        </p:spPr>
+      </p:pic>
+      <p:cxnSp>
+        <p:nvCxnSpPr>
+          <p:cNvPr id="6" name="Straight Arrow Connector 5">
+            <a:extLst>
+              <a:ext uri="{FF2B5EF4-FFF2-40B4-BE49-F238E27FC236}">
+                <a16:creationId xmlns:a16="http://schemas.microsoft.com/office/drawing/2014/main" id="{227F0A3B-5593-4BC4-A2D0-B7F5C7C2626B}"/>
+              </a:ext>
+            </a:extLst>
+          </p:cNvPr>
+          <p:cNvCxnSpPr>
+            <a:cxnSpLocks/>
+          </p:cNvCxnSpPr>
+          <p:nvPr/>
+        </p:nvCxnSpPr>
+        <p:spPr>
+          <a:xfrm>
+            <a:off x="6601522" y="2906751"/>
+            <a:ext cx="1382751" cy="0"/>
+          </a:xfrm>
+          <a:prstGeom prst="straightConnector1">
+            <a:avLst/>
+          </a:prstGeom>
+          <a:ln>
+            <a:tailEnd type="triangle"/>
+          </a:ln>
+        </p:spPr>
+        <p:style>
+          <a:lnRef idx="1">
+            <a:schemeClr val="accent1"/>
+          </a:lnRef>
+          <a:fillRef idx="0">
+            <a:schemeClr val="accent1"/>
+          </a:fillRef>
+          <a:effectRef idx="0">
+            <a:schemeClr val="accent1"/>
+          </a:effectRef>
+          <a:fontRef idx="minor">
+            <a:schemeClr val="tx1"/>
+          </a:fontRef>
+        </p:style>
+      </p:cxnSp>
+    </p:spTree>
+    <p:extLst>
+      <p:ext uri="{BB962C8B-B14F-4D97-AF65-F5344CB8AC3E}">
+        <p14:creationId xmlns:p14="http://schemas.microsoft.com/office/powerpoint/2010/main" val="3447560027"/>
+      </p:ext>
+    </p:extLst>
+  </p:cSld>
+  <p:clrMapOvr>
+    <a:masterClrMapping/>
+  </p:clrMapOvr>
+</p:sld>
+</file>
+
+<file path=ppt/slides/slide13.xml><?xml version="1.0" encoding="utf-8"?>
+<p:sld xmlns:a="http://schemas.openxmlformats.org/drawingml/2006/main" xmlns:r="http://schemas.openxmlformats.org/officeDocument/2006/relationships" xmlns:p="http://schemas.openxmlformats.org/presentationml/2006/main">
+  <p:cSld>
+    <p:spTree>
+      <p:nvGrpSpPr>
+        <p:cNvPr id="1" name=""/>
+        <p:cNvGrpSpPr/>
+        <p:nvPr/>
+      </p:nvGrpSpPr>
+      <p:grpSpPr>
+        <a:xfrm>
+          <a:off x="0" y="0"/>
+          <a:ext cx="0" cy="0"/>
+          <a:chOff x="0" y="0"/>
+          <a:chExt cx="0" cy="0"/>
+        </a:xfrm>
+      </p:grpSpPr>
+      <p:sp>
+        <p:nvSpPr>
+          <p:cNvPr id="2" name="Title 1">
+            <a:extLst>
+              <a:ext uri="{FF2B5EF4-FFF2-40B4-BE49-F238E27FC236}">
+                <a16:creationId xmlns:a16="http://schemas.microsoft.com/office/drawing/2014/main" id="{0CF21A06-C636-48C9-BDBC-F9790C260C4F}"/>
+              </a:ext>
+            </a:extLst>
+          </p:cNvPr>
+          <p:cNvSpPr>
+            <a:spLocks noGrp="1"/>
+          </p:cNvSpPr>
+          <p:nvPr>
+            <p:ph type="title"/>
+          </p:nvPr>
+        </p:nvSpPr>
+        <p:spPr/>
+        <p:txBody>
+          <a:bodyPr/>
+          <a:lstStyle/>
+          <a:p>
+            <a:r>
+              <a:rPr lang="en-US" dirty="0"/>
+              <a:t>Hint – to see how arguments are stored</a:t>
+            </a:r>
+            <a:endParaRPr lang="en-CA" dirty="0"/>
+          </a:p>
+        </p:txBody>
+      </p:sp>
+      <p:sp>
+        <p:nvSpPr>
+          <p:cNvPr id="3" name="Content Placeholder 2">
+            <a:extLst>
+              <a:ext uri="{FF2B5EF4-FFF2-40B4-BE49-F238E27FC236}">
+                <a16:creationId xmlns:a16="http://schemas.microsoft.com/office/drawing/2014/main" id="{977D4CD8-5893-485E-9A25-915097186032}"/>
+              </a:ext>
+            </a:extLst>
+          </p:cNvPr>
+          <p:cNvSpPr>
+            <a:spLocks noGrp="1"/>
+          </p:cNvSpPr>
+          <p:nvPr>
+            <p:ph idx="1"/>
+          </p:nvPr>
+        </p:nvSpPr>
+        <p:spPr/>
+        <p:txBody>
+          <a:bodyPr>
+            <a:normAutofit/>
+          </a:bodyPr>
+          <a:lstStyle/>
+          <a:p>
+            <a:pPr marL="0" indent="0">
+              <a:buNone/>
+            </a:pPr>
+            <a:r>
+              <a:rPr lang="en-US" sz="2000" dirty="0">
+                <a:solidFill>
+                  <a:srgbClr val="0000FF"/>
+                </a:solidFill>
+                <a:effectLst/>
+                <a:latin typeface="Consolas, "/>
+              </a:rPr>
+              <a:t>int</a:t>
+            </a:r>
+            <a:r>
+              <a:rPr lang="en-US" sz="2000" dirty="0">
+                <a:solidFill>
+                  <a:srgbClr val="000000"/>
+                </a:solidFill>
+                <a:effectLst/>
+                <a:latin typeface="Consolas, "/>
+              </a:rPr>
+              <a:t> </a:t>
+            </a:r>
+            <a:r>
+              <a:rPr lang="en-US" sz="2000" dirty="0" err="1">
+                <a:solidFill>
+                  <a:srgbClr val="000000"/>
+                </a:solidFill>
+                <a:effectLst/>
+                <a:latin typeface="Consolas, "/>
+              </a:rPr>
+              <a:t>another_function</a:t>
+            </a:r>
+            <a:r>
+              <a:rPr lang="en-US" sz="2000" dirty="0">
+                <a:solidFill>
+                  <a:srgbClr val="000000"/>
+                </a:solidFill>
+                <a:effectLst/>
+                <a:latin typeface="Consolas, "/>
+              </a:rPr>
+              <a:t>(</a:t>
+            </a:r>
+            <a:r>
+              <a:rPr lang="en-US" sz="2000" dirty="0">
+                <a:solidFill>
+                  <a:srgbClr val="0000FF"/>
+                </a:solidFill>
+                <a:effectLst/>
+                <a:latin typeface="Consolas, "/>
+              </a:rPr>
+              <a:t>int</a:t>
+            </a:r>
+            <a:r>
+              <a:rPr lang="en-US" sz="2000" dirty="0">
+                <a:solidFill>
+                  <a:srgbClr val="000000"/>
+                </a:solidFill>
+                <a:effectLst/>
+                <a:latin typeface="Consolas, "/>
+              </a:rPr>
+              <a:t> a, </a:t>
+            </a:r>
+            <a:r>
+              <a:rPr lang="en-US" sz="2000" dirty="0">
+                <a:solidFill>
+                  <a:srgbClr val="0000FF"/>
+                </a:solidFill>
+                <a:effectLst/>
+                <a:latin typeface="Consolas, "/>
+              </a:rPr>
+              <a:t>int</a:t>
+            </a:r>
+            <a:r>
+              <a:rPr lang="en-US" sz="2000" dirty="0">
+                <a:solidFill>
+                  <a:srgbClr val="000000"/>
+                </a:solidFill>
+                <a:effectLst/>
+                <a:latin typeface="Consolas, "/>
+              </a:rPr>
+              <a:t> b, </a:t>
+            </a:r>
+            <a:r>
+              <a:rPr lang="en-US" sz="2000" dirty="0">
+                <a:solidFill>
+                  <a:srgbClr val="0000FF"/>
+                </a:solidFill>
+                <a:effectLst/>
+                <a:latin typeface="Consolas, "/>
+              </a:rPr>
+              <a:t>int</a:t>
+            </a:r>
+            <a:r>
+              <a:rPr lang="en-US" sz="2000" dirty="0">
+                <a:solidFill>
+                  <a:srgbClr val="000000"/>
+                </a:solidFill>
+                <a:effectLst/>
+                <a:latin typeface="Consolas, "/>
+              </a:rPr>
+              <a:t> c, </a:t>
+            </a:r>
+            <a:r>
+              <a:rPr lang="en-US" sz="2000" dirty="0">
+                <a:solidFill>
+                  <a:srgbClr val="0000FF"/>
+                </a:solidFill>
+                <a:effectLst/>
+                <a:latin typeface="Consolas, "/>
+              </a:rPr>
+              <a:t>int</a:t>
+            </a:r>
+            <a:r>
+              <a:rPr lang="en-US" sz="2000" dirty="0">
+                <a:solidFill>
+                  <a:srgbClr val="000000"/>
+                </a:solidFill>
+                <a:effectLst/>
+                <a:latin typeface="Consolas, "/>
+              </a:rPr>
+              <a:t> d, </a:t>
+            </a:r>
+            <a:r>
+              <a:rPr lang="en-US" sz="2000" dirty="0">
+                <a:solidFill>
+                  <a:srgbClr val="0000FF"/>
+                </a:solidFill>
+                <a:effectLst/>
+                <a:latin typeface="Consolas, "/>
+              </a:rPr>
+              <a:t>int</a:t>
+            </a:r>
+            <a:r>
+              <a:rPr lang="en-US" sz="2000" dirty="0">
+                <a:solidFill>
+                  <a:srgbClr val="000000"/>
+                </a:solidFill>
+                <a:effectLst/>
+                <a:latin typeface="Consolas, "/>
+              </a:rPr>
+              <a:t> e, </a:t>
+            </a:r>
+            <a:r>
+              <a:rPr lang="en-US" sz="2000" dirty="0">
+                <a:solidFill>
+                  <a:srgbClr val="0000FF"/>
+                </a:solidFill>
+                <a:effectLst/>
+                <a:latin typeface="Consolas, "/>
+              </a:rPr>
+              <a:t>int</a:t>
+            </a:r>
+            <a:r>
+              <a:rPr lang="en-US" sz="2000" dirty="0">
+                <a:solidFill>
+                  <a:srgbClr val="000000"/>
+                </a:solidFill>
+                <a:effectLst/>
+                <a:latin typeface="Consolas, "/>
+              </a:rPr>
+              <a:t> f, </a:t>
+            </a:r>
+            <a:r>
+              <a:rPr lang="en-US" sz="2000" dirty="0">
+                <a:solidFill>
+                  <a:srgbClr val="0000FF"/>
+                </a:solidFill>
+                <a:effectLst/>
+                <a:latin typeface="Consolas, "/>
+              </a:rPr>
+              <a:t>int</a:t>
+            </a:r>
+            <a:r>
+              <a:rPr lang="en-US" sz="2000" dirty="0">
+                <a:solidFill>
+                  <a:srgbClr val="000000"/>
+                </a:solidFill>
+                <a:effectLst/>
+                <a:latin typeface="Consolas, "/>
+              </a:rPr>
+              <a:t> g)</a:t>
+            </a:r>
+          </a:p>
+          <a:p>
+            <a:pPr marL="0" indent="0">
+              <a:buNone/>
+            </a:pPr>
+            <a:r>
+              <a:rPr lang="en-US" sz="2000" dirty="0">
+                <a:solidFill>
+                  <a:srgbClr val="000000"/>
+                </a:solidFill>
+                <a:effectLst/>
+                <a:latin typeface="Consolas, "/>
+              </a:rPr>
+              <a:t>{</a:t>
+            </a:r>
+          </a:p>
+          <a:p>
+            <a:pPr marL="0" indent="0">
+              <a:buNone/>
+            </a:pPr>
+            <a:r>
+              <a:rPr lang="en-US" sz="2000" dirty="0">
+                <a:solidFill>
+                  <a:srgbClr val="000000"/>
+                </a:solidFill>
+                <a:effectLst/>
+                <a:latin typeface="Consolas, "/>
+              </a:rPr>
+              <a:t>    </a:t>
+            </a:r>
+            <a:r>
+              <a:rPr lang="en-US" sz="2000" dirty="0">
+                <a:solidFill>
+                  <a:srgbClr val="0000FF"/>
+                </a:solidFill>
+                <a:effectLst/>
+                <a:latin typeface="Consolas, "/>
+              </a:rPr>
+              <a:t>return</a:t>
+            </a:r>
+            <a:r>
+              <a:rPr lang="en-US" sz="2000" dirty="0">
+                <a:solidFill>
+                  <a:srgbClr val="000000"/>
+                </a:solidFill>
+                <a:effectLst/>
+                <a:latin typeface="Consolas, "/>
+              </a:rPr>
+              <a:t> a + b;</a:t>
+            </a:r>
+          </a:p>
+          <a:p>
+            <a:pPr marL="0" indent="0">
+              <a:buNone/>
+            </a:pPr>
+            <a:r>
+              <a:rPr lang="en-US" sz="2000" dirty="0">
+                <a:solidFill>
+                  <a:srgbClr val="000000"/>
+                </a:solidFill>
+                <a:effectLst/>
+                <a:latin typeface="Consolas, "/>
+              </a:rPr>
+              <a:t>}</a:t>
+            </a:r>
+          </a:p>
+          <a:p>
+            <a:pPr marL="0" indent="0">
+              <a:buNone/>
+            </a:pPr>
+            <a:br>
+              <a:rPr lang="en-US" sz="2000" dirty="0">
+                <a:solidFill>
+                  <a:srgbClr val="000000"/>
+                </a:solidFill>
+                <a:effectLst/>
+                <a:latin typeface="Consolas, "/>
+              </a:rPr>
+            </a:br>
+            <a:r>
+              <a:rPr lang="en-US" sz="2000" dirty="0">
+                <a:solidFill>
+                  <a:srgbClr val="0000FF"/>
+                </a:solidFill>
+                <a:effectLst/>
+                <a:latin typeface="Consolas, "/>
+              </a:rPr>
+              <a:t>int</a:t>
+            </a:r>
+            <a:r>
+              <a:rPr lang="en-US" sz="2000" dirty="0">
+                <a:solidFill>
+                  <a:srgbClr val="000000"/>
+                </a:solidFill>
+                <a:effectLst/>
+                <a:latin typeface="Consolas, "/>
+              </a:rPr>
+              <a:t> main(</a:t>
+            </a:r>
+            <a:r>
+              <a:rPr lang="en-US" sz="2000" dirty="0">
+                <a:solidFill>
+                  <a:srgbClr val="0000FF"/>
+                </a:solidFill>
+                <a:effectLst/>
+                <a:latin typeface="Consolas, "/>
+              </a:rPr>
+              <a:t>void</a:t>
+            </a:r>
+            <a:r>
+              <a:rPr lang="en-US" sz="2000" dirty="0">
+                <a:solidFill>
+                  <a:srgbClr val="000000"/>
+                </a:solidFill>
+                <a:effectLst/>
+                <a:latin typeface="Consolas, "/>
+              </a:rPr>
+              <a:t>)</a:t>
+            </a:r>
+          </a:p>
+          <a:p>
+            <a:pPr marL="0" indent="0">
+              <a:buNone/>
+            </a:pPr>
+            <a:r>
+              <a:rPr lang="en-US" sz="2000" dirty="0">
+                <a:solidFill>
+                  <a:srgbClr val="000000"/>
+                </a:solidFill>
+                <a:effectLst/>
+                <a:latin typeface="Consolas, "/>
+              </a:rPr>
+              <a:t>{</a:t>
+            </a:r>
+          </a:p>
+          <a:p>
+            <a:pPr marL="0" indent="0">
+              <a:buNone/>
+            </a:pPr>
+            <a:r>
+              <a:rPr lang="en-US" sz="2000" dirty="0">
+                <a:solidFill>
+                  <a:srgbClr val="000000"/>
+                </a:solidFill>
+                <a:effectLst/>
+                <a:latin typeface="Consolas, "/>
+              </a:rPr>
+              <a:t>    </a:t>
+            </a:r>
+            <a:r>
+              <a:rPr lang="en-US" sz="2000" dirty="0" err="1">
+                <a:solidFill>
+                  <a:srgbClr val="000000"/>
+                </a:solidFill>
+                <a:effectLst/>
+                <a:latin typeface="Consolas, "/>
+              </a:rPr>
+              <a:t>another_function</a:t>
+            </a:r>
+            <a:r>
+              <a:rPr lang="en-US" sz="2000" dirty="0">
+                <a:solidFill>
+                  <a:srgbClr val="000000"/>
+                </a:solidFill>
+                <a:effectLst/>
+                <a:latin typeface="Consolas, "/>
+              </a:rPr>
+              <a:t>(</a:t>
+            </a:r>
+            <a:r>
+              <a:rPr lang="en-US" sz="2000" dirty="0">
+                <a:solidFill>
+                  <a:srgbClr val="098658"/>
+                </a:solidFill>
+                <a:effectLst/>
+                <a:latin typeface="Consolas, "/>
+              </a:rPr>
+              <a:t>4</a:t>
+            </a:r>
+            <a:r>
+              <a:rPr lang="en-US" sz="2000" dirty="0">
+                <a:solidFill>
+                  <a:srgbClr val="000000"/>
+                </a:solidFill>
+                <a:effectLst/>
+                <a:latin typeface="Consolas, "/>
+              </a:rPr>
+              <a:t>, </a:t>
+            </a:r>
+            <a:r>
+              <a:rPr lang="en-US" sz="2000" dirty="0">
+                <a:solidFill>
+                  <a:srgbClr val="098658"/>
+                </a:solidFill>
+                <a:effectLst/>
+                <a:latin typeface="Consolas, "/>
+              </a:rPr>
+              <a:t>2</a:t>
+            </a:r>
+            <a:r>
+              <a:rPr lang="en-US" sz="2000" dirty="0">
+                <a:solidFill>
+                  <a:srgbClr val="000000"/>
+                </a:solidFill>
+                <a:effectLst/>
+                <a:latin typeface="Consolas, "/>
+              </a:rPr>
+              <a:t>, </a:t>
+            </a:r>
+            <a:r>
+              <a:rPr lang="en-US" sz="2000" dirty="0">
+                <a:solidFill>
+                  <a:srgbClr val="098658"/>
+                </a:solidFill>
+                <a:effectLst/>
+                <a:latin typeface="Consolas, "/>
+              </a:rPr>
+              <a:t>5</a:t>
+            </a:r>
+            <a:r>
+              <a:rPr lang="en-US" sz="2000" dirty="0">
+                <a:solidFill>
+                  <a:srgbClr val="000000"/>
+                </a:solidFill>
+                <a:effectLst/>
+                <a:latin typeface="Consolas, "/>
+              </a:rPr>
+              <a:t>, </a:t>
+            </a:r>
+            <a:r>
+              <a:rPr lang="en-US" sz="2000" dirty="0">
+                <a:solidFill>
+                  <a:srgbClr val="098658"/>
+                </a:solidFill>
+                <a:effectLst/>
+                <a:latin typeface="Consolas, "/>
+              </a:rPr>
+              <a:t>6</a:t>
+            </a:r>
+            <a:r>
+              <a:rPr lang="en-US" sz="2000" dirty="0">
+                <a:solidFill>
+                  <a:srgbClr val="000000"/>
+                </a:solidFill>
+                <a:effectLst/>
+                <a:latin typeface="Consolas, "/>
+              </a:rPr>
+              <a:t>, </a:t>
+            </a:r>
+            <a:r>
+              <a:rPr lang="en-US" sz="2000" dirty="0">
+                <a:solidFill>
+                  <a:srgbClr val="098658"/>
+                </a:solidFill>
+                <a:effectLst/>
+                <a:latin typeface="Consolas, "/>
+              </a:rPr>
+              <a:t>2</a:t>
+            </a:r>
+            <a:r>
+              <a:rPr lang="en-US" sz="2000" dirty="0">
+                <a:solidFill>
+                  <a:srgbClr val="000000"/>
+                </a:solidFill>
+                <a:effectLst/>
+                <a:latin typeface="Consolas, "/>
+              </a:rPr>
+              <a:t>, </a:t>
+            </a:r>
+            <a:r>
+              <a:rPr lang="en-US" sz="2000" dirty="0">
+                <a:solidFill>
+                  <a:srgbClr val="098658"/>
+                </a:solidFill>
+                <a:effectLst/>
+                <a:latin typeface="Consolas, "/>
+              </a:rPr>
+              <a:t>4</a:t>
+            </a:r>
+            <a:r>
+              <a:rPr lang="en-US" sz="2000" dirty="0">
+                <a:solidFill>
+                  <a:srgbClr val="000000"/>
+                </a:solidFill>
+                <a:effectLst/>
+                <a:latin typeface="Consolas, "/>
+              </a:rPr>
+              <a:t>, </a:t>
+            </a:r>
+            <a:r>
+              <a:rPr lang="en-US" sz="2000" dirty="0">
+                <a:solidFill>
+                  <a:srgbClr val="098658"/>
+                </a:solidFill>
+                <a:effectLst/>
+                <a:latin typeface="Consolas, "/>
+              </a:rPr>
+              <a:t>2</a:t>
+            </a:r>
+            <a:r>
+              <a:rPr lang="en-US" sz="2000" dirty="0">
+                <a:solidFill>
+                  <a:srgbClr val="000000"/>
+                </a:solidFill>
+                <a:effectLst/>
+                <a:latin typeface="Consolas, "/>
+              </a:rPr>
+              <a:t>);</a:t>
+            </a:r>
+          </a:p>
+          <a:p>
+            <a:pPr marL="0" indent="0">
+              <a:buNone/>
+            </a:pPr>
+            <a:r>
+              <a:rPr lang="en-US" sz="2000" dirty="0">
+                <a:solidFill>
+                  <a:srgbClr val="000000"/>
+                </a:solidFill>
+                <a:effectLst/>
+                <a:latin typeface="Consolas, "/>
+              </a:rPr>
+              <a:t>}</a:t>
+            </a:r>
+          </a:p>
+          <a:p>
+            <a:pPr marL="0" indent="0">
+              <a:buNone/>
+            </a:pPr>
+            <a:endParaRPr lang="en-CA" sz="2000" dirty="0">
+              <a:latin typeface="Courier New" panose="02070309020205020404" pitchFamily="49" charset="0"/>
+              <a:cs typeface="Courier New" panose="02070309020205020404" pitchFamily="49" charset="0"/>
+            </a:endParaRPr>
+          </a:p>
+        </p:txBody>
+      </p:sp>
+    </p:spTree>
+    <p:extLst>
+      <p:ext uri="{BB962C8B-B14F-4D97-AF65-F5344CB8AC3E}">
+        <p14:creationId xmlns:p14="http://schemas.microsoft.com/office/powerpoint/2010/main" val="3209101230"/>
+      </p:ext>
+    </p:extLst>
+  </p:cSld>
+  <p:clrMapOvr>
+    <a:masterClrMapping/>
+  </p:clrMapOvr>
+</p:sld>
+</file>
+
+<file path=ppt/slides/slide14.xml><?xml version="1.0" encoding="utf-8"?>
+<p:sld xmlns:a="http://schemas.openxmlformats.org/drawingml/2006/main" xmlns:r="http://schemas.openxmlformats.org/officeDocument/2006/relationships" xmlns:p="http://schemas.openxmlformats.org/presentationml/2006/main">
+  <p:cSld>
+    <p:spTree>
+      <p:nvGrpSpPr>
+        <p:cNvPr id="1" name=""/>
+        <p:cNvGrpSpPr/>
+        <p:nvPr/>
+      </p:nvGrpSpPr>
+      <p:grpSpPr>
+        <a:xfrm>
+          <a:off x="0" y="0"/>
+          <a:ext cx="0" cy="0"/>
+          <a:chOff x="0" y="0"/>
+          <a:chExt cx="0" cy="0"/>
+        </a:xfrm>
+      </p:grpSpPr>
+      <p:sp>
+        <p:nvSpPr>
+          <p:cNvPr id="2" name="Title 1">
+            <a:extLst>
+              <a:ext uri="{FF2B5EF4-FFF2-40B4-BE49-F238E27FC236}">
+                <a16:creationId xmlns:a16="http://schemas.microsoft.com/office/drawing/2014/main" id="{F40A019F-0D8C-4186-98A9-5D4549B49D35}"/>
+              </a:ext>
+            </a:extLst>
+          </p:cNvPr>
+          <p:cNvSpPr>
+            <a:spLocks noGrp="1"/>
+          </p:cNvSpPr>
+          <p:nvPr>
+            <p:ph type="title"/>
+          </p:nvPr>
+        </p:nvSpPr>
+        <p:spPr/>
+        <p:txBody>
+          <a:bodyPr/>
+          <a:lstStyle/>
+          <a:p>
+            <a:r>
+              <a:rPr lang="en-US" dirty="0"/>
+              <a:t>Function Calls</a:t>
+            </a:r>
+            <a:endParaRPr lang="en-CA" dirty="0"/>
+          </a:p>
+        </p:txBody>
+      </p:sp>
+      <p:sp>
+        <p:nvSpPr>
+          <p:cNvPr id="3" name="Content Placeholder 2">
+            <a:extLst>
+              <a:ext uri="{FF2B5EF4-FFF2-40B4-BE49-F238E27FC236}">
+                <a16:creationId xmlns:a16="http://schemas.microsoft.com/office/drawing/2014/main" id="{B971B074-D68E-420A-A710-40FF5697414E}"/>
+              </a:ext>
+            </a:extLst>
+          </p:cNvPr>
+          <p:cNvSpPr>
+            <a:spLocks noGrp="1"/>
+          </p:cNvSpPr>
+          <p:nvPr>
+            <p:ph idx="1"/>
+          </p:nvPr>
+        </p:nvSpPr>
+        <p:spPr/>
+        <p:txBody>
+          <a:bodyPr/>
+          <a:lstStyle/>
+          <a:p>
+            <a:r>
+              <a:rPr lang="en-US" dirty="0"/>
+              <a:t>Calling convention is how various function calls pass arguments.</a:t>
+            </a:r>
+          </a:p>
+          <a:p>
+            <a:r>
+              <a:rPr lang="en-US" dirty="0"/>
+              <a:t>Calling conventions vary for architectures &amp; compilers.</a:t>
+            </a:r>
+          </a:p>
+          <a:p>
+            <a:r>
+              <a:rPr lang="en-US" dirty="0"/>
+              <a:t>Can find calling convention information (normally) in compiler documentation.</a:t>
+            </a:r>
+          </a:p>
+          <a:p>
+            <a:r>
+              <a:rPr lang="en-US" dirty="0"/>
+              <a:t>Functions themselves will normally do setup (prologue) &amp; teardown (epilogue)</a:t>
+            </a:r>
+            <a:endParaRPr lang="en-CA" dirty="0"/>
+          </a:p>
+        </p:txBody>
+      </p:sp>
+    </p:spTree>
+    <p:extLst>
+      <p:ext uri="{BB962C8B-B14F-4D97-AF65-F5344CB8AC3E}">
+        <p14:creationId xmlns:p14="http://schemas.microsoft.com/office/powerpoint/2010/main" val="1467330257"/>
+      </p:ext>
+    </p:extLst>
+  </p:cSld>
+  <p:clrMapOvr>
+    <a:masterClrMapping/>
+  </p:clrMapOvr>
+</p:sld>
+</file>
+
+<file path=ppt/slides/slide15.xml><?xml version="1.0" encoding="utf-8"?>
+<p:sld xmlns:a="http://schemas.openxmlformats.org/drawingml/2006/main" xmlns:r="http://schemas.openxmlformats.org/officeDocument/2006/relationships" xmlns:p="http://schemas.openxmlformats.org/presentationml/2006/main">
+  <p:cSld>
+    <p:spTree>
+      <p:nvGrpSpPr>
+        <p:cNvPr id="1" name=""/>
+        <p:cNvGrpSpPr/>
+        <p:nvPr/>
+      </p:nvGrpSpPr>
+      <p:grpSpPr>
+        <a:xfrm>
+          <a:off x="0" y="0"/>
+          <a:ext cx="0" cy="0"/>
+          <a:chOff x="0" y="0"/>
+          <a:chExt cx="0" cy="0"/>
+        </a:xfrm>
+      </p:grpSpPr>
+      <p:sp>
+        <p:nvSpPr>
+          <p:cNvPr id="2" name="Title 1">
+            <a:extLst>
+              <a:ext uri="{FF2B5EF4-FFF2-40B4-BE49-F238E27FC236}">
+                <a16:creationId xmlns:a16="http://schemas.microsoft.com/office/drawing/2014/main" id="{9FE6795F-9543-4957-BBAA-24BCAFF68157}"/>
+              </a:ext>
+            </a:extLst>
+          </p:cNvPr>
+          <p:cNvSpPr>
+            <a:spLocks noGrp="1"/>
+          </p:cNvSpPr>
+          <p:nvPr>
+            <p:ph type="title"/>
+          </p:nvPr>
+        </p:nvSpPr>
+        <p:spPr/>
+        <p:txBody>
+          <a:bodyPr/>
+          <a:lstStyle/>
+          <a:p>
+            <a:r>
+              <a:rPr lang="en-US" dirty="0"/>
+              <a:t>Example: </a:t>
+            </a:r>
+            <a:r>
+              <a:rPr lang="en-US" dirty="0" err="1"/>
+              <a:t>avr-gcc</a:t>
+            </a:r>
+            <a:r>
+              <a:rPr lang="en-US" dirty="0"/>
+              <a:t> calling convention</a:t>
+            </a:r>
+            <a:endParaRPr lang="en-CA" dirty="0"/>
+          </a:p>
+        </p:txBody>
+      </p:sp>
+      <p:sp>
+        <p:nvSpPr>
+          <p:cNvPr id="3" name="Content Placeholder 2">
+            <a:extLst>
+              <a:ext uri="{FF2B5EF4-FFF2-40B4-BE49-F238E27FC236}">
+                <a16:creationId xmlns:a16="http://schemas.microsoft.com/office/drawing/2014/main" id="{A9BE099D-526F-47AE-AA3D-9B493C4BBC78}"/>
+              </a:ext>
+            </a:extLst>
+          </p:cNvPr>
+          <p:cNvSpPr>
+            <a:spLocks noGrp="1"/>
+          </p:cNvSpPr>
+          <p:nvPr>
+            <p:ph idx="1"/>
+          </p:nvPr>
+        </p:nvSpPr>
+        <p:spPr/>
+        <p:txBody>
+          <a:bodyPr>
+            <a:normAutofit fontScale="62500" lnSpcReduction="20000"/>
+          </a:bodyPr>
+          <a:lstStyle/>
+          <a:p>
+            <a:pPr marL="0" indent="0">
+              <a:buNone/>
+            </a:pPr>
+            <a:r>
+              <a:rPr lang="en-US" b="1" dirty="0"/>
+              <a:t>Function call conventions:</a:t>
+            </a:r>
+          </a:p>
+          <a:p>
+            <a:r>
+              <a:rPr lang="en-US" dirty="0"/>
+              <a:t>Arguments - allocated left to right, r25 to r8.</a:t>
+            </a:r>
+          </a:p>
+          <a:p>
+            <a:r>
+              <a:rPr lang="en-US" dirty="0"/>
+              <a:t>All arguments are aligned to start in even-numbered registers (odd-sized arguments, including char, have one free register above them). This allows making better use of the </a:t>
+            </a:r>
+            <a:r>
+              <a:rPr lang="en-US" dirty="0" err="1"/>
+              <a:t>movw</a:t>
+            </a:r>
+            <a:r>
+              <a:rPr lang="en-US" dirty="0"/>
+              <a:t> instruction on the enhanced core.</a:t>
+            </a:r>
+          </a:p>
+          <a:p>
+            <a:r>
+              <a:rPr lang="en-US" dirty="0"/>
+              <a:t>If too many, those that don't fit are passed on the stack.</a:t>
+            </a:r>
+          </a:p>
+          <a:p>
+            <a:pPr marL="0" indent="0">
+              <a:buNone/>
+            </a:pPr>
+            <a:endParaRPr lang="en-US" dirty="0"/>
+          </a:p>
+          <a:p>
+            <a:r>
+              <a:rPr lang="en-US" dirty="0"/>
+              <a:t>Return values:</a:t>
+            </a:r>
+          </a:p>
+          <a:p>
+            <a:pPr lvl="1"/>
+            <a:r>
+              <a:rPr lang="en-US" dirty="0"/>
+              <a:t>8-bit in r24 (not r25!)</a:t>
+            </a:r>
+          </a:p>
+          <a:p>
+            <a:pPr lvl="1"/>
+            <a:r>
+              <a:rPr lang="en-US" dirty="0"/>
+              <a:t>16-bit in r25:r24</a:t>
+            </a:r>
+          </a:p>
+          <a:p>
+            <a:pPr lvl="1"/>
+            <a:r>
+              <a:rPr lang="en-US" dirty="0"/>
+              <a:t>up to 32 bits in r22-r25</a:t>
+            </a:r>
+          </a:p>
+          <a:p>
+            <a:pPr lvl="1"/>
+            <a:r>
+              <a:rPr lang="en-US" dirty="0"/>
+              <a:t>up to 64 bits in r18-r25</a:t>
+            </a:r>
+          </a:p>
+          <a:p>
+            <a:pPr lvl="1"/>
+            <a:r>
+              <a:rPr lang="en-US" dirty="0"/>
+              <a:t> 8-bit return values are zero/sign-extended to 16 bits by the called function (unsigned char is more efficient than signed char - just </a:t>
+            </a:r>
+            <a:r>
+              <a:rPr lang="en-US" dirty="0" err="1"/>
+              <a:t>clr</a:t>
+            </a:r>
+            <a:r>
+              <a:rPr lang="en-US" dirty="0"/>
+              <a:t> r25).</a:t>
+            </a:r>
+          </a:p>
+          <a:p>
+            <a:r>
+              <a:rPr lang="en-US" dirty="0"/>
+              <a:t>Arguments to functions with variable argument lists (</a:t>
+            </a:r>
+            <a:r>
+              <a:rPr lang="en-US" dirty="0" err="1"/>
+              <a:t>printf</a:t>
+            </a:r>
+            <a:r>
+              <a:rPr lang="en-US" dirty="0"/>
+              <a:t> etc.) are all passed on stack, and char is extended to int.</a:t>
+            </a:r>
+            <a:endParaRPr lang="en-CA" dirty="0"/>
+          </a:p>
+        </p:txBody>
+      </p:sp>
+      <p:sp>
+        <p:nvSpPr>
+          <p:cNvPr id="5" name="TextBox 4">
+            <a:extLst>
+              <a:ext uri="{FF2B5EF4-FFF2-40B4-BE49-F238E27FC236}">
+                <a16:creationId xmlns:a16="http://schemas.microsoft.com/office/drawing/2014/main" id="{7EE89416-3594-48B1-8E8C-DCCDAF486382}"/>
+              </a:ext>
+            </a:extLst>
+          </p:cNvPr>
+          <p:cNvSpPr txBox="1"/>
+          <p:nvPr/>
+        </p:nvSpPr>
+        <p:spPr>
+          <a:xfrm>
+            <a:off x="2676293" y="6127234"/>
+            <a:ext cx="6096000" cy="369332"/>
+          </a:xfrm>
+          <a:prstGeom prst="rect">
+            <a:avLst/>
+          </a:prstGeom>
+          <a:noFill/>
+        </p:spPr>
+        <p:txBody>
+          <a:bodyPr wrap="square">
+            <a:spAutoFit/>
+          </a:bodyPr>
+          <a:lstStyle/>
+          <a:p>
+            <a:r>
+              <a:rPr lang="en-CA" dirty="0"/>
+              <a:t>https://www.nongnu.org/avr-libc/user-manual/FAQ.html</a:t>
+            </a:r>
+          </a:p>
+        </p:txBody>
+      </p:sp>
+    </p:spTree>
+    <p:extLst>
+      <p:ext uri="{BB962C8B-B14F-4D97-AF65-F5344CB8AC3E}">
+        <p14:creationId xmlns:p14="http://schemas.microsoft.com/office/powerpoint/2010/main" val="1402216086"/>
+      </p:ext>
+    </p:extLst>
+  </p:cSld>
+  <p:clrMapOvr>
+    <a:masterClrMapping/>
+  </p:clrMapOvr>
+</p:sld>
+</file>
+
+<file path=ppt/slides/slide16.xml><?xml version="1.0" encoding="utf-8"?>
+<p:sld xmlns:a="http://schemas.openxmlformats.org/drawingml/2006/main" xmlns:r="http://schemas.openxmlformats.org/officeDocument/2006/relationships" xmlns:p="http://schemas.openxmlformats.org/presentationml/2006/main">
+  <p:cSld>
+    <p:spTree>
+      <p:nvGrpSpPr>
+        <p:cNvPr id="1" name=""/>
+        <p:cNvGrpSpPr/>
+        <p:nvPr/>
+      </p:nvGrpSpPr>
+      <p:grpSpPr>
+        <a:xfrm>
+          <a:off x="0" y="0"/>
+          <a:ext cx="0" cy="0"/>
+          <a:chOff x="0" y="0"/>
+          <a:chExt cx="0" cy="0"/>
+        </a:xfrm>
+      </p:grpSpPr>
+      <p:sp>
+        <p:nvSpPr>
+          <p:cNvPr id="2" name="Title 1">
+            <a:extLst>
+              <a:ext uri="{FF2B5EF4-FFF2-40B4-BE49-F238E27FC236}">
+                <a16:creationId xmlns:a16="http://schemas.microsoft.com/office/drawing/2014/main" id="{D12B2CC8-11EC-426D-8973-4D6CE90222E2}"/>
+              </a:ext>
+            </a:extLst>
+          </p:cNvPr>
+          <p:cNvSpPr>
+            <a:spLocks noGrp="1"/>
+          </p:cNvSpPr>
+          <p:nvPr>
+            <p:ph type="title"/>
+          </p:nvPr>
+        </p:nvSpPr>
+        <p:spPr/>
+        <p:txBody>
+          <a:bodyPr/>
+          <a:lstStyle/>
+          <a:p>
+            <a:r>
+              <a:rPr lang="en-US" dirty="0"/>
+              <a:t>Example IAR </a:t>
+            </a:r>
+            <a:r>
+              <a:rPr lang="en-US" dirty="0" err="1"/>
+              <a:t>avr</a:t>
+            </a:r>
+            <a:r>
+              <a:rPr lang="en-US" dirty="0"/>
+              <a:t> calling convention</a:t>
+            </a:r>
+            <a:endParaRPr lang="en-CA" dirty="0"/>
+          </a:p>
+        </p:txBody>
+      </p:sp>
+      <p:sp>
+        <p:nvSpPr>
+          <p:cNvPr id="3" name="Content Placeholder 2">
+            <a:extLst>
+              <a:ext uri="{FF2B5EF4-FFF2-40B4-BE49-F238E27FC236}">
+                <a16:creationId xmlns:a16="http://schemas.microsoft.com/office/drawing/2014/main" id="{90032EA3-0E32-4CBC-82C7-31BC67C14E6E}"/>
+              </a:ext>
+            </a:extLst>
+          </p:cNvPr>
+          <p:cNvSpPr>
+            <a:spLocks noGrp="1"/>
+          </p:cNvSpPr>
+          <p:nvPr>
+            <p:ph idx="1"/>
+          </p:nvPr>
+        </p:nvSpPr>
+        <p:spPr/>
+        <p:txBody>
+          <a:bodyPr/>
+          <a:lstStyle/>
+          <a:p>
+            <a:r>
+              <a:rPr lang="en-US" dirty="0"/>
+              <a:t>Recognizing calling conventions </a:t>
+            </a:r>
+            <a:endParaRPr lang="en-CA" dirty="0"/>
+          </a:p>
+        </p:txBody>
+      </p:sp>
+      <p:sp>
+        <p:nvSpPr>
+          <p:cNvPr id="5" name="TextBox 4">
+            <a:extLst>
+              <a:ext uri="{FF2B5EF4-FFF2-40B4-BE49-F238E27FC236}">
+                <a16:creationId xmlns:a16="http://schemas.microsoft.com/office/drawing/2014/main" id="{44B1C959-4D5B-4681-B730-7E919EE53248}"/>
+              </a:ext>
+            </a:extLst>
+          </p:cNvPr>
+          <p:cNvSpPr txBox="1"/>
+          <p:nvPr/>
+        </p:nvSpPr>
+        <p:spPr>
+          <a:xfrm>
+            <a:off x="639336" y="5988734"/>
+            <a:ext cx="10714463" cy="646331"/>
+          </a:xfrm>
+          <a:prstGeom prst="rect">
+            <a:avLst/>
+          </a:prstGeom>
+          <a:noFill/>
+        </p:spPr>
+        <p:txBody>
+          <a:bodyPr wrap="square">
+            <a:spAutoFit/>
+          </a:bodyPr>
+          <a:lstStyle/>
+          <a:p>
+            <a:r>
+              <a:rPr lang="en-CA" dirty="0">
+                <a:hlinkClick r:id="rId2"/>
+              </a:rPr>
+              <a:t>http://ftp.indes.com/pub/mirrors/ftp.iar.se/WWWfiles/avr/webic/doc/EWAVR_CompilerGuide.pdf</a:t>
+            </a:r>
+            <a:endParaRPr lang="en-CA" dirty="0"/>
+          </a:p>
+          <a:p>
+            <a:r>
+              <a:rPr lang="en-CA" dirty="0"/>
+              <a:t>Flip to page 159</a:t>
+            </a:r>
+          </a:p>
+        </p:txBody>
+      </p:sp>
+      <p:pic>
+        <p:nvPicPr>
+          <p:cNvPr id="6" name="Picture 5">
+            <a:extLst>
+              <a:ext uri="{FF2B5EF4-FFF2-40B4-BE49-F238E27FC236}">
+                <a16:creationId xmlns:a16="http://schemas.microsoft.com/office/drawing/2014/main" id="{DA99B679-49CB-4F7B-9BC9-F07B8A3DEA00}"/>
+              </a:ext>
+            </a:extLst>
+          </p:cNvPr>
+          <p:cNvPicPr>
+            <a:picLocks noChangeAspect="1"/>
+          </p:cNvPicPr>
+          <p:nvPr/>
+        </p:nvPicPr>
+        <p:blipFill>
+          <a:blip r:embed="rId3"/>
+          <a:stretch>
+            <a:fillRect/>
+          </a:stretch>
+        </p:blipFill>
+        <p:spPr>
+          <a:xfrm>
+            <a:off x="1545996" y="2421712"/>
+            <a:ext cx="7381100" cy="3499553"/>
+          </a:xfrm>
+          <a:prstGeom prst="rect">
+            <a:avLst/>
+          </a:prstGeom>
+        </p:spPr>
+      </p:pic>
+    </p:spTree>
+    <p:extLst>
+      <p:ext uri="{BB962C8B-B14F-4D97-AF65-F5344CB8AC3E}">
+        <p14:creationId xmlns:p14="http://schemas.microsoft.com/office/powerpoint/2010/main" val="1192183851"/>
+      </p:ext>
+    </p:extLst>
+  </p:cSld>
+  <p:clrMapOvr>
+    <a:masterClrMapping/>
+  </p:clrMapOvr>
+</p:sld>
+</file>
+
+<file path=ppt/slides/slide17.xml><?xml version="1.0" encoding="utf-8"?>
+<p:sld xmlns:a="http://schemas.openxmlformats.org/drawingml/2006/main" xmlns:r="http://schemas.openxmlformats.org/officeDocument/2006/relationships" xmlns:p="http://schemas.openxmlformats.org/presentationml/2006/main">
+  <p:cSld>
+    <p:spTree>
+      <p:nvGrpSpPr>
+        <p:cNvPr id="1" name=""/>
+        <p:cNvGrpSpPr/>
+        <p:nvPr/>
+      </p:nvGrpSpPr>
+      <p:grpSpPr>
+        <a:xfrm>
+          <a:off x="0" y="0"/>
+          <a:ext cx="0" cy="0"/>
+          <a:chOff x="0" y="0"/>
+          <a:chExt cx="0" cy="0"/>
+        </a:xfrm>
+      </p:grpSpPr>
+      <p:sp>
+        <p:nvSpPr>
+          <p:cNvPr id="2" name="Title 1">
+            <a:extLst>
+              <a:ext uri="{FF2B5EF4-FFF2-40B4-BE49-F238E27FC236}">
+                <a16:creationId xmlns:a16="http://schemas.microsoft.com/office/drawing/2014/main" id="{DEB0D604-DD36-4C7B-9DEE-A0681FDEF3B1}"/>
+              </a:ext>
+            </a:extLst>
+          </p:cNvPr>
+          <p:cNvSpPr>
+            <a:spLocks noGrp="1"/>
+          </p:cNvSpPr>
+          <p:nvPr>
+            <p:ph type="title"/>
+          </p:nvPr>
+        </p:nvSpPr>
+        <p:spPr/>
+        <p:txBody>
+          <a:bodyPr/>
+          <a:lstStyle/>
+          <a:p>
+            <a:r>
+              <a:rPr lang="en-US" dirty="0"/>
+              <a:t>Calling Convention – Different Compilers</a:t>
+            </a:r>
+            <a:endParaRPr lang="en-CA" dirty="0"/>
+          </a:p>
+        </p:txBody>
+      </p:sp>
+      <p:sp>
+        <p:nvSpPr>
+          <p:cNvPr id="3" name="Content Placeholder 2">
+            <a:extLst>
+              <a:ext uri="{FF2B5EF4-FFF2-40B4-BE49-F238E27FC236}">
+                <a16:creationId xmlns:a16="http://schemas.microsoft.com/office/drawing/2014/main" id="{BC645D7A-2A68-4951-8608-EE6B4396832B}"/>
+              </a:ext>
+            </a:extLst>
+          </p:cNvPr>
+          <p:cNvSpPr>
+            <a:spLocks noGrp="1"/>
+          </p:cNvSpPr>
+          <p:nvPr>
+            <p:ph idx="1"/>
+          </p:nvPr>
+        </p:nvSpPr>
+        <p:spPr/>
+        <p:txBody>
+          <a:bodyPr/>
+          <a:lstStyle/>
+          <a:p>
+            <a:r>
+              <a:rPr lang="en-US" dirty="0"/>
+              <a:t>Calling convention of the two compilers is different, even with same target (AVR in this case).</a:t>
+            </a:r>
+          </a:p>
+          <a:p>
+            <a:endParaRPr lang="en-US" dirty="0"/>
+          </a:p>
+          <a:p>
+            <a:r>
+              <a:rPr lang="en-US" dirty="0"/>
+              <a:t>Recognizing calling conventions important for reverse engineering.</a:t>
+            </a:r>
+            <a:endParaRPr lang="en-CA" dirty="0"/>
+          </a:p>
+        </p:txBody>
+      </p:sp>
+    </p:spTree>
+    <p:extLst>
+      <p:ext uri="{BB962C8B-B14F-4D97-AF65-F5344CB8AC3E}">
+        <p14:creationId xmlns:p14="http://schemas.microsoft.com/office/powerpoint/2010/main" val="3601328831"/>
+      </p:ext>
+    </p:extLst>
+  </p:cSld>
+  <p:clrMapOvr>
+    <a:masterClrMapping/>
+  </p:clrMapOvr>
+</p:sld>
+</file>
+
+<file path=ppt/slides/slide18.xml><?xml version="1.0" encoding="utf-8"?>
+<p:sld xmlns:a="http://schemas.openxmlformats.org/drawingml/2006/main" xmlns:r="http://schemas.openxmlformats.org/officeDocument/2006/relationships" xmlns:p="http://schemas.openxmlformats.org/presentationml/2006/main">
+  <p:cSld>
+    <p:spTree>
+      <p:nvGrpSpPr>
+        <p:cNvPr id="1" name=""/>
+        <p:cNvGrpSpPr/>
+        <p:nvPr/>
+      </p:nvGrpSpPr>
+      <p:grpSpPr>
+        <a:xfrm>
+          <a:off x="0" y="0"/>
+          <a:ext cx="0" cy="0"/>
+          <a:chOff x="0" y="0"/>
+          <a:chExt cx="0" cy="0"/>
+        </a:xfrm>
+      </p:grpSpPr>
+      <p:sp>
+        <p:nvSpPr>
+          <p:cNvPr id="2" name="Title 1">
+            <a:extLst>
+              <a:ext uri="{FF2B5EF4-FFF2-40B4-BE49-F238E27FC236}">
+                <a16:creationId xmlns:a16="http://schemas.microsoft.com/office/drawing/2014/main" id="{812ADF74-1D9E-4A0C-B4E8-008DF2FAE69E}"/>
+              </a:ext>
+            </a:extLst>
+          </p:cNvPr>
+          <p:cNvSpPr>
+            <a:spLocks noGrp="1"/>
+          </p:cNvSpPr>
+          <p:nvPr>
+            <p:ph type="title"/>
+          </p:nvPr>
+        </p:nvSpPr>
+        <p:spPr/>
+        <p:txBody>
+          <a:bodyPr/>
+          <a:lstStyle/>
+          <a:p>
+            <a:r>
+              <a:rPr lang="en-US" dirty="0"/>
+              <a:t>Recognizing function calls</a:t>
+            </a:r>
+            <a:endParaRPr lang="en-CA" dirty="0"/>
+          </a:p>
+        </p:txBody>
+      </p:sp>
+      <p:sp>
+        <p:nvSpPr>
+          <p:cNvPr id="3" name="Content Placeholder 2">
+            <a:extLst>
+              <a:ext uri="{FF2B5EF4-FFF2-40B4-BE49-F238E27FC236}">
+                <a16:creationId xmlns:a16="http://schemas.microsoft.com/office/drawing/2014/main" id="{33C35C6D-FEEF-4059-A760-B20D98FAD5F4}"/>
+              </a:ext>
+            </a:extLst>
+          </p:cNvPr>
+          <p:cNvSpPr>
+            <a:spLocks noGrp="1"/>
+          </p:cNvSpPr>
+          <p:nvPr>
+            <p:ph idx="1"/>
+          </p:nvPr>
+        </p:nvSpPr>
+        <p:spPr/>
+        <p:txBody>
+          <a:bodyPr/>
+          <a:lstStyle/>
+          <a:p>
+            <a:r>
+              <a:rPr lang="en-US" dirty="0"/>
+              <a:t>We can see call to function.</a:t>
+            </a:r>
+          </a:p>
+          <a:p>
+            <a:r>
+              <a:rPr lang="en-US" dirty="0"/>
+              <a:t>We normally see return at end of function.</a:t>
+            </a:r>
+          </a:p>
+          <a:p>
+            <a:r>
+              <a:rPr lang="en-US" dirty="0"/>
+              <a:t>..What about in between?</a:t>
+            </a:r>
+            <a:endParaRPr lang="en-CA" dirty="0"/>
+          </a:p>
+        </p:txBody>
+      </p:sp>
+      <p:pic>
+        <p:nvPicPr>
+          <p:cNvPr id="5" name="Picture 4">
+            <a:extLst>
+              <a:ext uri="{FF2B5EF4-FFF2-40B4-BE49-F238E27FC236}">
+                <a16:creationId xmlns:a16="http://schemas.microsoft.com/office/drawing/2014/main" id="{09965B2D-8F77-4F37-A127-4257E103578F}"/>
+              </a:ext>
+            </a:extLst>
+          </p:cNvPr>
+          <p:cNvPicPr>
+            <a:picLocks noChangeAspect="1"/>
+          </p:cNvPicPr>
+          <p:nvPr/>
+        </p:nvPicPr>
+        <p:blipFill>
+          <a:blip r:embed="rId2"/>
+          <a:stretch>
+            <a:fillRect/>
+          </a:stretch>
+        </p:blipFill>
+        <p:spPr>
+          <a:xfrm>
+            <a:off x="448241" y="4384448"/>
+            <a:ext cx="3534268" cy="1047896"/>
+          </a:xfrm>
+          <a:prstGeom prst="rect">
+            <a:avLst/>
+          </a:prstGeom>
+        </p:spPr>
+      </p:pic>
+      <p:pic>
+        <p:nvPicPr>
+          <p:cNvPr id="6" name="Picture 5">
+            <a:extLst>
+              <a:ext uri="{FF2B5EF4-FFF2-40B4-BE49-F238E27FC236}">
+                <a16:creationId xmlns:a16="http://schemas.microsoft.com/office/drawing/2014/main" id="{C94B4E2B-3C35-4346-AEE8-F3CBD4A55B54}"/>
+              </a:ext>
+            </a:extLst>
+          </p:cNvPr>
+          <p:cNvPicPr>
+            <a:picLocks noChangeAspect="1"/>
+          </p:cNvPicPr>
+          <p:nvPr/>
+        </p:nvPicPr>
+        <p:blipFill>
+          <a:blip r:embed="rId3"/>
+          <a:stretch>
+            <a:fillRect/>
+          </a:stretch>
+        </p:blipFill>
+        <p:spPr>
+          <a:xfrm>
+            <a:off x="5654953" y="3031709"/>
+            <a:ext cx="4896533" cy="3753374"/>
+          </a:xfrm>
+          <a:prstGeom prst="rect">
+            <a:avLst/>
+          </a:prstGeom>
+        </p:spPr>
+      </p:pic>
+      <p:cxnSp>
+        <p:nvCxnSpPr>
+          <p:cNvPr id="8" name="Straight Arrow Connector 7">
+            <a:extLst>
+              <a:ext uri="{FF2B5EF4-FFF2-40B4-BE49-F238E27FC236}">
+                <a16:creationId xmlns:a16="http://schemas.microsoft.com/office/drawing/2014/main" id="{C3F03094-42CA-41E0-BEC2-D3E8AF477086}"/>
+              </a:ext>
+            </a:extLst>
+          </p:cNvPr>
+          <p:cNvCxnSpPr/>
+          <p:nvPr/>
+        </p:nvCxnSpPr>
+        <p:spPr>
+          <a:xfrm flipV="1">
+            <a:off x="4118517" y="6482576"/>
+            <a:ext cx="1709854" cy="141248"/>
+          </a:xfrm>
+          <a:prstGeom prst="straightConnector1">
+            <a:avLst/>
+          </a:prstGeom>
+          <a:ln>
+            <a:tailEnd type="triangle"/>
+          </a:ln>
+        </p:spPr>
+        <p:style>
+          <a:lnRef idx="1">
+            <a:schemeClr val="accent1"/>
+          </a:lnRef>
+          <a:fillRef idx="0">
+            <a:schemeClr val="accent1"/>
+          </a:fillRef>
+          <a:effectRef idx="0">
+            <a:schemeClr val="accent1"/>
+          </a:effectRef>
+          <a:fontRef idx="minor">
+            <a:schemeClr val="tx1"/>
+          </a:fontRef>
+        </p:style>
+      </p:cxnSp>
+      <p:sp>
+        <p:nvSpPr>
+          <p:cNvPr id="9" name="TextBox 8">
+            <a:extLst>
+              <a:ext uri="{FF2B5EF4-FFF2-40B4-BE49-F238E27FC236}">
+                <a16:creationId xmlns:a16="http://schemas.microsoft.com/office/drawing/2014/main" id="{A6C62103-C1BA-4AAA-829B-C14FFFD459C3}"/>
+              </a:ext>
+            </a:extLst>
+          </p:cNvPr>
+          <p:cNvSpPr txBox="1"/>
+          <p:nvPr/>
+        </p:nvSpPr>
+        <p:spPr>
+          <a:xfrm>
+            <a:off x="3187079" y="6427432"/>
+            <a:ext cx="1590859" cy="374684"/>
+          </a:xfrm>
+          <a:prstGeom prst="rect">
+            <a:avLst/>
+          </a:prstGeom>
+          <a:noFill/>
+        </p:spPr>
+        <p:txBody>
+          <a:bodyPr wrap="square" rtlCol="0">
+            <a:spAutoFit/>
+          </a:bodyPr>
+          <a:lstStyle/>
+          <a:p>
+            <a:r>
+              <a:rPr lang="en-US" dirty="0"/>
+              <a:t>return</a:t>
+            </a:r>
+            <a:endParaRPr lang="en-CA" dirty="0"/>
+          </a:p>
+        </p:txBody>
+      </p:sp>
+    </p:spTree>
+    <p:extLst>
+      <p:ext uri="{BB962C8B-B14F-4D97-AF65-F5344CB8AC3E}">
+        <p14:creationId xmlns:p14="http://schemas.microsoft.com/office/powerpoint/2010/main" val="1950979145"/>
+      </p:ext>
+    </p:extLst>
+  </p:cSld>
+  <p:clrMapOvr>
+    <a:masterClrMapping/>
+  </p:clrMapOvr>
+</p:sld>
+</file>
+
+<file path=ppt/slides/slide19.xml><?xml version="1.0" encoding="utf-8"?>
+<p:sld xmlns:a="http://schemas.openxmlformats.org/drawingml/2006/main" xmlns:r="http://schemas.openxmlformats.org/officeDocument/2006/relationships" xmlns:p="http://schemas.openxmlformats.org/presentationml/2006/main">
+  <p:cSld>
+    <p:spTree>
+      <p:nvGrpSpPr>
+        <p:cNvPr id="1" name=""/>
+        <p:cNvGrpSpPr/>
+        <p:nvPr/>
+      </p:nvGrpSpPr>
+      <p:grpSpPr>
+        <a:xfrm>
+          <a:off x="0" y="0"/>
+          <a:ext cx="0" cy="0"/>
+          <a:chOff x="0" y="0"/>
+          <a:chExt cx="0" cy="0"/>
+        </a:xfrm>
+      </p:grpSpPr>
+      <p:sp>
+        <p:nvSpPr>
+          <p:cNvPr id="2" name="Title 1">
+            <a:extLst>
+              <a:ext uri="{FF2B5EF4-FFF2-40B4-BE49-F238E27FC236}">
+                <a16:creationId xmlns:a16="http://schemas.microsoft.com/office/drawing/2014/main" id="{74CD6ACF-C771-4A66-8306-815A7FE69CE3}"/>
+              </a:ext>
+            </a:extLst>
+          </p:cNvPr>
+          <p:cNvSpPr>
+            <a:spLocks noGrp="1"/>
+          </p:cNvSpPr>
+          <p:nvPr>
+            <p:ph type="title"/>
+          </p:nvPr>
+        </p:nvSpPr>
+        <p:spPr/>
+        <p:txBody>
+          <a:bodyPr/>
+          <a:lstStyle/>
+          <a:p>
+            <a:r>
+              <a:rPr lang="en-US" dirty="0"/>
+              <a:t>Function Calls</a:t>
+            </a:r>
+            <a:endParaRPr lang="en-CA" dirty="0"/>
+          </a:p>
+        </p:txBody>
+      </p:sp>
+      <p:sp>
+        <p:nvSpPr>
+          <p:cNvPr id="3" name="Content Placeholder 2">
+            <a:extLst>
+              <a:ext uri="{FF2B5EF4-FFF2-40B4-BE49-F238E27FC236}">
+                <a16:creationId xmlns:a16="http://schemas.microsoft.com/office/drawing/2014/main" id="{914C06FA-B733-426D-8506-137902D12C4D}"/>
+              </a:ext>
+            </a:extLst>
+          </p:cNvPr>
+          <p:cNvSpPr>
+            <a:spLocks noGrp="1"/>
+          </p:cNvSpPr>
+          <p:nvPr>
+            <p:ph idx="1"/>
+          </p:nvPr>
+        </p:nvSpPr>
+        <p:spPr/>
+        <p:txBody>
+          <a:bodyPr/>
+          <a:lstStyle/>
+          <a:p>
+            <a:r>
+              <a:rPr lang="en-US" dirty="0"/>
+              <a:t>Much of this deals around the usage of the </a:t>
+            </a:r>
+            <a:r>
+              <a:rPr lang="en-US" i="1" dirty="0"/>
+              <a:t>stack</a:t>
+            </a:r>
+            <a:r>
+              <a:rPr lang="en-US" dirty="0"/>
+              <a:t> – this should have been covered in your computer architecture classes and this is just a refresher.</a:t>
+            </a:r>
+          </a:p>
+          <a:p>
+            <a:endParaRPr lang="en-US" dirty="0"/>
+          </a:p>
+          <a:p>
+            <a:r>
+              <a:rPr lang="en-US" dirty="0"/>
+              <a:t>If you need a refresher:</a:t>
+            </a:r>
+            <a:r>
+              <a:rPr lang="en-CA" dirty="0"/>
+              <a:t> </a:t>
+            </a:r>
+            <a:r>
+              <a:rPr lang="en-CA" dirty="0">
+                <a:hlinkClick r:id="rId2"/>
+              </a:rPr>
+              <a:t>https://azeria-labs.com/functions-and-the-stack-part-7/</a:t>
+            </a:r>
+            <a:r>
+              <a:rPr lang="en-CA" dirty="0"/>
+              <a:t> </a:t>
+            </a:r>
+            <a:endParaRPr lang="en-US" dirty="0"/>
+          </a:p>
+        </p:txBody>
+      </p:sp>
+    </p:spTree>
+    <p:extLst>
+      <p:ext uri="{BB962C8B-B14F-4D97-AF65-F5344CB8AC3E}">
+        <p14:creationId xmlns:p14="http://schemas.microsoft.com/office/powerpoint/2010/main" val="2129043618"/>
       </p:ext>
     </p:extLst>
   </p:cSld>
@@ -3617,6 +5591,1424 @@
     <p:extLst>
       <p:ext uri="{BB962C8B-B14F-4D97-AF65-F5344CB8AC3E}">
         <p14:creationId xmlns:p14="http://schemas.microsoft.com/office/powerpoint/2010/main" val="2414040597"/>
+      </p:ext>
+    </p:extLst>
+  </p:cSld>
+  <p:clrMapOvr>
+    <a:masterClrMapping/>
+  </p:clrMapOvr>
+</p:sld>
+</file>
+
+<file path=ppt/slides/slide20.xml><?xml version="1.0" encoding="utf-8"?>
+<p:sld xmlns:a="http://schemas.openxmlformats.org/drawingml/2006/main" xmlns:r="http://schemas.openxmlformats.org/officeDocument/2006/relationships" xmlns:p="http://schemas.openxmlformats.org/presentationml/2006/main">
+  <p:cSld>
+    <p:spTree>
+      <p:nvGrpSpPr>
+        <p:cNvPr id="1" name=""/>
+        <p:cNvGrpSpPr/>
+        <p:nvPr/>
+      </p:nvGrpSpPr>
+      <p:grpSpPr>
+        <a:xfrm>
+          <a:off x="0" y="0"/>
+          <a:ext cx="0" cy="0"/>
+          <a:chOff x="0" y="0"/>
+          <a:chExt cx="0" cy="0"/>
+        </a:xfrm>
+      </p:grpSpPr>
+      <p:pic>
+        <p:nvPicPr>
+          <p:cNvPr id="4" name="Content Placeholder 3">
+            <a:extLst>
+              <a:ext uri="{FF2B5EF4-FFF2-40B4-BE49-F238E27FC236}">
+                <a16:creationId xmlns:a16="http://schemas.microsoft.com/office/drawing/2014/main" id="{A0775BE8-AA8E-4E6F-919D-2DDF9A78BB66}"/>
+              </a:ext>
+            </a:extLst>
+          </p:cNvPr>
+          <p:cNvPicPr>
+            <a:picLocks noGrp="1" noChangeAspect="1"/>
+          </p:cNvPicPr>
+          <p:nvPr>
+            <p:ph idx="1"/>
+          </p:nvPr>
+        </p:nvPicPr>
+        <p:blipFill>
+          <a:blip r:embed="rId2"/>
+          <a:stretch>
+            <a:fillRect/>
+          </a:stretch>
+        </p:blipFill>
+        <p:spPr>
+          <a:xfrm>
+            <a:off x="456865" y="1429698"/>
+            <a:ext cx="11694147" cy="5428301"/>
+          </a:xfrm>
+          <a:prstGeom prst="rect">
+            <a:avLst/>
+          </a:prstGeom>
+        </p:spPr>
+      </p:pic>
+      <p:sp>
+        <p:nvSpPr>
+          <p:cNvPr id="2" name="Title 1">
+            <a:extLst>
+              <a:ext uri="{FF2B5EF4-FFF2-40B4-BE49-F238E27FC236}">
+                <a16:creationId xmlns:a16="http://schemas.microsoft.com/office/drawing/2014/main" id="{D4A8111B-4625-42CA-9C5F-F6EE27D9288A}"/>
+              </a:ext>
+            </a:extLst>
+          </p:cNvPr>
+          <p:cNvSpPr>
+            <a:spLocks noGrp="1"/>
+          </p:cNvSpPr>
+          <p:nvPr>
+            <p:ph type="title"/>
+          </p:nvPr>
+        </p:nvSpPr>
+        <p:spPr/>
+        <p:txBody>
+          <a:bodyPr/>
+          <a:lstStyle/>
+          <a:p>
+            <a:r>
+              <a:rPr lang="en-US" dirty="0"/>
+              <a:t>Example of Local Variables</a:t>
+            </a:r>
+            <a:endParaRPr lang="en-CA" dirty="0"/>
+          </a:p>
+        </p:txBody>
+      </p:sp>
+      <p:sp>
+        <p:nvSpPr>
+          <p:cNvPr id="5" name="Rectangle 4">
+            <a:extLst>
+              <a:ext uri="{FF2B5EF4-FFF2-40B4-BE49-F238E27FC236}">
+                <a16:creationId xmlns:a16="http://schemas.microsoft.com/office/drawing/2014/main" id="{4849BD12-E91A-455C-8A92-5B277DAEEEDF}"/>
+              </a:ext>
+            </a:extLst>
+          </p:cNvPr>
+          <p:cNvSpPr/>
+          <p:nvPr/>
+        </p:nvSpPr>
+        <p:spPr>
+          <a:xfrm>
+            <a:off x="1278903" y="2228270"/>
+            <a:ext cx="321297" cy="191080"/>
+          </a:xfrm>
+          <a:prstGeom prst="rect">
+            <a:avLst/>
+          </a:prstGeom>
+          <a:noFill/>
+          <a:ln>
+            <a:solidFill>
+              <a:srgbClr val="FF0000"/>
+            </a:solidFill>
+          </a:ln>
+        </p:spPr>
+        <p:style>
+          <a:lnRef idx="2">
+            <a:schemeClr val="accent1">
+              <a:shade val="50000"/>
+            </a:schemeClr>
+          </a:lnRef>
+          <a:fillRef idx="1">
+            <a:schemeClr val="accent1"/>
+          </a:fillRef>
+          <a:effectRef idx="0">
+            <a:schemeClr val="accent1"/>
+          </a:effectRef>
+          <a:fontRef idx="minor">
+            <a:schemeClr val="lt1"/>
+          </a:fontRef>
+        </p:style>
+        <p:txBody>
+          <a:bodyPr rtlCol="0" anchor="ctr"/>
+          <a:lstStyle/>
+          <a:p>
+            <a:pPr algn="ctr"/>
+            <a:endParaRPr lang="en-CA"/>
+          </a:p>
+        </p:txBody>
+      </p:sp>
+      <p:sp>
+        <p:nvSpPr>
+          <p:cNvPr id="6" name="Rectangle 5">
+            <a:extLst>
+              <a:ext uri="{FF2B5EF4-FFF2-40B4-BE49-F238E27FC236}">
+                <a16:creationId xmlns:a16="http://schemas.microsoft.com/office/drawing/2014/main" id="{22BF0BC8-9D2E-423E-8387-DFCBAEC21C24}"/>
+              </a:ext>
+            </a:extLst>
+          </p:cNvPr>
+          <p:cNvSpPr/>
+          <p:nvPr/>
+        </p:nvSpPr>
+        <p:spPr>
+          <a:xfrm>
+            <a:off x="7251700" y="2755261"/>
+            <a:ext cx="1676400" cy="368939"/>
+          </a:xfrm>
+          <a:prstGeom prst="rect">
+            <a:avLst/>
+          </a:prstGeom>
+          <a:noFill/>
+          <a:ln w="28575">
+            <a:solidFill>
+              <a:srgbClr val="FF0000"/>
+            </a:solidFill>
+          </a:ln>
+        </p:spPr>
+        <p:style>
+          <a:lnRef idx="2">
+            <a:schemeClr val="accent1">
+              <a:shade val="50000"/>
+            </a:schemeClr>
+          </a:lnRef>
+          <a:fillRef idx="1">
+            <a:schemeClr val="accent1"/>
+          </a:fillRef>
+          <a:effectRef idx="0">
+            <a:schemeClr val="accent1"/>
+          </a:effectRef>
+          <a:fontRef idx="minor">
+            <a:schemeClr val="lt1"/>
+          </a:fontRef>
+        </p:style>
+        <p:txBody>
+          <a:bodyPr rtlCol="0" anchor="ctr"/>
+          <a:lstStyle/>
+          <a:p>
+            <a:pPr algn="ctr"/>
+            <a:endParaRPr lang="en-CA"/>
+          </a:p>
+        </p:txBody>
+      </p:sp>
+    </p:spTree>
+    <p:extLst>
+      <p:ext uri="{BB962C8B-B14F-4D97-AF65-F5344CB8AC3E}">
+        <p14:creationId xmlns:p14="http://schemas.microsoft.com/office/powerpoint/2010/main" val="723530600"/>
+      </p:ext>
+    </p:extLst>
+  </p:cSld>
+  <p:clrMapOvr>
+    <a:masterClrMapping/>
+  </p:clrMapOvr>
+</p:sld>
+</file>
+
+<file path=ppt/slides/slide21.xml><?xml version="1.0" encoding="utf-8"?>
+<p:sld xmlns:a="http://schemas.openxmlformats.org/drawingml/2006/main" xmlns:r="http://schemas.openxmlformats.org/officeDocument/2006/relationships" xmlns:p="http://schemas.openxmlformats.org/presentationml/2006/main">
+  <p:cSld>
+    <p:spTree>
+      <p:nvGrpSpPr>
+        <p:cNvPr id="1" name=""/>
+        <p:cNvGrpSpPr/>
+        <p:nvPr/>
+      </p:nvGrpSpPr>
+      <p:grpSpPr>
+        <a:xfrm>
+          <a:off x="0" y="0"/>
+          <a:ext cx="0" cy="0"/>
+          <a:chOff x="0" y="0"/>
+          <a:chExt cx="0" cy="0"/>
+        </a:xfrm>
+      </p:grpSpPr>
+      <p:sp>
+        <p:nvSpPr>
+          <p:cNvPr id="2" name="Title 1">
+            <a:extLst>
+              <a:ext uri="{FF2B5EF4-FFF2-40B4-BE49-F238E27FC236}">
+                <a16:creationId xmlns:a16="http://schemas.microsoft.com/office/drawing/2014/main" id="{C63E51D4-C607-42D6-8B3C-11CAC2434B28}"/>
+              </a:ext>
+            </a:extLst>
+          </p:cNvPr>
+          <p:cNvSpPr>
+            <a:spLocks noGrp="1"/>
+          </p:cNvSpPr>
+          <p:nvPr>
+            <p:ph type="title"/>
+          </p:nvPr>
+        </p:nvSpPr>
+        <p:spPr/>
+        <p:txBody>
+          <a:bodyPr/>
+          <a:lstStyle/>
+          <a:p>
+            <a:r>
+              <a:rPr lang="en-US" dirty="0"/>
+              <a:t>Where do local variables get stored?</a:t>
+            </a:r>
+            <a:endParaRPr lang="en-CA" dirty="0"/>
+          </a:p>
+        </p:txBody>
+      </p:sp>
+      <p:sp>
+        <p:nvSpPr>
+          <p:cNvPr id="3" name="Content Placeholder 2">
+            <a:extLst>
+              <a:ext uri="{FF2B5EF4-FFF2-40B4-BE49-F238E27FC236}">
+                <a16:creationId xmlns:a16="http://schemas.microsoft.com/office/drawing/2014/main" id="{CC7857A1-FF24-494D-9408-9DFDD7ED2133}"/>
+              </a:ext>
+            </a:extLst>
+          </p:cNvPr>
+          <p:cNvSpPr>
+            <a:spLocks noGrp="1"/>
+          </p:cNvSpPr>
+          <p:nvPr>
+            <p:ph idx="1"/>
+          </p:nvPr>
+        </p:nvSpPr>
+        <p:spPr/>
+        <p:txBody>
+          <a:bodyPr/>
+          <a:lstStyle/>
+          <a:p>
+            <a:r>
+              <a:rPr lang="en-US" dirty="0"/>
+              <a:t>Often stored in </a:t>
+            </a:r>
+            <a:r>
+              <a:rPr lang="en-US" i="1" dirty="0"/>
+              <a:t>registers</a:t>
+            </a:r>
+            <a:r>
+              <a:rPr lang="en-US" dirty="0"/>
+              <a:t>.</a:t>
+            </a:r>
+          </a:p>
+          <a:p>
+            <a:r>
+              <a:rPr lang="en-US" dirty="0"/>
+              <a:t>May also be stored in memory (RAM), normally when:</a:t>
+            </a:r>
+          </a:p>
+          <a:p>
+            <a:pPr lvl="1"/>
+            <a:r>
+              <a:rPr lang="en-US" dirty="0"/>
+              <a:t>Compiler has run out of registers to use.</a:t>
+            </a:r>
+          </a:p>
+          <a:p>
+            <a:pPr lvl="1"/>
+            <a:r>
+              <a:rPr lang="en-US" dirty="0"/>
+              <a:t>Variable is declared static (stays around).</a:t>
+            </a:r>
+          </a:p>
+          <a:p>
+            <a:pPr lvl="1"/>
+            <a:r>
+              <a:rPr lang="en-US" dirty="0"/>
+              <a:t>Variable is declared volatile.</a:t>
+            </a:r>
+          </a:p>
+          <a:p>
+            <a:pPr lvl="1"/>
+            <a:r>
+              <a:rPr lang="en-US" dirty="0"/>
+              <a:t>Compiler feels like it (optimization disabled, other reasons).</a:t>
+            </a:r>
+            <a:endParaRPr lang="en-CA" dirty="0"/>
+          </a:p>
+        </p:txBody>
+      </p:sp>
+    </p:spTree>
+    <p:extLst>
+      <p:ext uri="{BB962C8B-B14F-4D97-AF65-F5344CB8AC3E}">
+        <p14:creationId xmlns:p14="http://schemas.microsoft.com/office/powerpoint/2010/main" val="2044148786"/>
+      </p:ext>
+    </p:extLst>
+  </p:cSld>
+  <p:clrMapOvr>
+    <a:masterClrMapping/>
+  </p:clrMapOvr>
+</p:sld>
+</file>
+
+<file path=ppt/slides/slide22.xml><?xml version="1.0" encoding="utf-8"?>
+<p:sld xmlns:a="http://schemas.openxmlformats.org/drawingml/2006/main" xmlns:r="http://schemas.openxmlformats.org/officeDocument/2006/relationships" xmlns:p="http://schemas.openxmlformats.org/presentationml/2006/main">
+  <p:cSld>
+    <p:spTree>
+      <p:nvGrpSpPr>
+        <p:cNvPr id="1" name=""/>
+        <p:cNvGrpSpPr/>
+        <p:nvPr/>
+      </p:nvGrpSpPr>
+      <p:grpSpPr>
+        <a:xfrm>
+          <a:off x="0" y="0"/>
+          <a:ext cx="0" cy="0"/>
+          <a:chOff x="0" y="0"/>
+          <a:chExt cx="0" cy="0"/>
+        </a:xfrm>
+      </p:grpSpPr>
+      <p:sp>
+        <p:nvSpPr>
+          <p:cNvPr id="2" name="Title 1">
+            <a:extLst>
+              <a:ext uri="{FF2B5EF4-FFF2-40B4-BE49-F238E27FC236}">
+                <a16:creationId xmlns:a16="http://schemas.microsoft.com/office/drawing/2014/main" id="{BCEE5506-D5E9-457B-A823-5C7BC1F0C7E2}"/>
+              </a:ext>
+            </a:extLst>
+          </p:cNvPr>
+          <p:cNvSpPr>
+            <a:spLocks noGrp="1"/>
+          </p:cNvSpPr>
+          <p:nvPr>
+            <p:ph type="title"/>
+          </p:nvPr>
+        </p:nvSpPr>
+        <p:spPr/>
+        <p:txBody>
+          <a:bodyPr/>
+          <a:lstStyle/>
+          <a:p>
+            <a:r>
+              <a:rPr lang="en-US" dirty="0"/>
+              <a:t>Registers vs. Memory?</a:t>
+            </a:r>
+            <a:endParaRPr lang="en-CA" dirty="0"/>
+          </a:p>
+        </p:txBody>
+      </p:sp>
+      <p:sp>
+        <p:nvSpPr>
+          <p:cNvPr id="3" name="Content Placeholder 2">
+            <a:extLst>
+              <a:ext uri="{FF2B5EF4-FFF2-40B4-BE49-F238E27FC236}">
+                <a16:creationId xmlns:a16="http://schemas.microsoft.com/office/drawing/2014/main" id="{B66D3E45-0E25-476A-A7C7-341C15440302}"/>
+              </a:ext>
+            </a:extLst>
+          </p:cNvPr>
+          <p:cNvSpPr>
+            <a:spLocks noGrp="1"/>
+          </p:cNvSpPr>
+          <p:nvPr>
+            <p:ph idx="1"/>
+          </p:nvPr>
+        </p:nvSpPr>
+        <p:spPr/>
+        <p:txBody>
+          <a:bodyPr/>
+          <a:lstStyle/>
+          <a:p>
+            <a:r>
+              <a:rPr lang="en-US" dirty="0"/>
+              <a:t>The CPU can only perform operations (such as comparisons, additions, </a:t>
+            </a:r>
+            <a:r>
+              <a:rPr lang="en-US" dirty="0" err="1"/>
+              <a:t>etc</a:t>
+            </a:r>
+            <a:r>
+              <a:rPr lang="en-US" dirty="0"/>
+              <a:t>) on registers.</a:t>
+            </a:r>
+          </a:p>
+          <a:p>
+            <a:r>
+              <a:rPr lang="en-US" dirty="0"/>
+              <a:t>Therefor </a:t>
+            </a:r>
+            <a:r>
+              <a:rPr lang="en-US" u="sng" dirty="0"/>
+              <a:t>all</a:t>
+            </a:r>
+            <a:r>
+              <a:rPr lang="en-US" dirty="0"/>
+              <a:t> variables will get moved from memory into registers when used.</a:t>
+            </a:r>
+          </a:p>
+          <a:p>
+            <a:endParaRPr lang="en-US" dirty="0"/>
+          </a:p>
+          <a:p>
+            <a:pPr marL="0" indent="0">
+              <a:buNone/>
+            </a:pPr>
+            <a:endParaRPr lang="en-CA" dirty="0"/>
+          </a:p>
+        </p:txBody>
+      </p:sp>
+      <p:pic>
+        <p:nvPicPr>
+          <p:cNvPr id="4" name="Picture 3">
+            <a:extLst>
+              <a:ext uri="{FF2B5EF4-FFF2-40B4-BE49-F238E27FC236}">
+                <a16:creationId xmlns:a16="http://schemas.microsoft.com/office/drawing/2014/main" id="{BF71F1CA-205C-4416-ADF5-7D550EE4AAE0}"/>
+              </a:ext>
+            </a:extLst>
+          </p:cNvPr>
+          <p:cNvPicPr>
+            <a:picLocks noChangeAspect="1"/>
+          </p:cNvPicPr>
+          <p:nvPr/>
+        </p:nvPicPr>
+        <p:blipFill>
+          <a:blip r:embed="rId2"/>
+          <a:stretch>
+            <a:fillRect/>
+          </a:stretch>
+        </p:blipFill>
+        <p:spPr>
+          <a:xfrm>
+            <a:off x="3542922" y="3611366"/>
+            <a:ext cx="5410955" cy="2810267"/>
+          </a:xfrm>
+          <a:prstGeom prst="rect">
+            <a:avLst/>
+          </a:prstGeom>
+        </p:spPr>
+      </p:pic>
+      <p:cxnSp>
+        <p:nvCxnSpPr>
+          <p:cNvPr id="6" name="Straight Arrow Connector 5">
+            <a:extLst>
+              <a:ext uri="{FF2B5EF4-FFF2-40B4-BE49-F238E27FC236}">
+                <a16:creationId xmlns:a16="http://schemas.microsoft.com/office/drawing/2014/main" id="{57477BA7-01ED-4235-9D67-CA81FD881B0C}"/>
+              </a:ext>
+            </a:extLst>
+          </p:cNvPr>
+          <p:cNvCxnSpPr/>
+          <p:nvPr/>
+        </p:nvCxnSpPr>
+        <p:spPr>
+          <a:xfrm flipH="1">
+            <a:off x="7188200" y="4451350"/>
+            <a:ext cx="2222500" cy="158750"/>
+          </a:xfrm>
+          <a:prstGeom prst="straightConnector1">
+            <a:avLst/>
+          </a:prstGeom>
+          <a:ln>
+            <a:tailEnd type="triangle"/>
+          </a:ln>
+        </p:spPr>
+        <p:style>
+          <a:lnRef idx="1">
+            <a:schemeClr val="accent1"/>
+          </a:lnRef>
+          <a:fillRef idx="0">
+            <a:schemeClr val="accent1"/>
+          </a:fillRef>
+          <a:effectRef idx="0">
+            <a:schemeClr val="accent1"/>
+          </a:effectRef>
+          <a:fontRef idx="minor">
+            <a:schemeClr val="tx1"/>
+          </a:fontRef>
+        </p:style>
+      </p:cxnSp>
+      <p:cxnSp>
+        <p:nvCxnSpPr>
+          <p:cNvPr id="7" name="Straight Arrow Connector 6">
+            <a:extLst>
+              <a:ext uri="{FF2B5EF4-FFF2-40B4-BE49-F238E27FC236}">
+                <a16:creationId xmlns:a16="http://schemas.microsoft.com/office/drawing/2014/main" id="{C8BBA5B7-9C23-4359-A6EB-CCDFB8FDA71F}"/>
+              </a:ext>
+            </a:extLst>
+          </p:cNvPr>
+          <p:cNvCxnSpPr>
+            <a:cxnSpLocks/>
+          </p:cNvCxnSpPr>
+          <p:nvPr/>
+        </p:nvCxnSpPr>
+        <p:spPr>
+          <a:xfrm flipH="1" flipV="1">
+            <a:off x="7188200" y="5097681"/>
+            <a:ext cx="2266950" cy="134719"/>
+          </a:xfrm>
+          <a:prstGeom prst="straightConnector1">
+            <a:avLst/>
+          </a:prstGeom>
+          <a:ln>
+            <a:tailEnd type="triangle"/>
+          </a:ln>
+        </p:spPr>
+        <p:style>
+          <a:lnRef idx="1">
+            <a:schemeClr val="accent1"/>
+          </a:lnRef>
+          <a:fillRef idx="0">
+            <a:schemeClr val="accent1"/>
+          </a:fillRef>
+          <a:effectRef idx="0">
+            <a:schemeClr val="accent1"/>
+          </a:effectRef>
+          <a:fontRef idx="minor">
+            <a:schemeClr val="tx1"/>
+          </a:fontRef>
+        </p:style>
+      </p:cxnSp>
+      <p:sp>
+        <p:nvSpPr>
+          <p:cNvPr id="8" name="TextBox 7">
+            <a:extLst>
+              <a:ext uri="{FF2B5EF4-FFF2-40B4-BE49-F238E27FC236}">
+                <a16:creationId xmlns:a16="http://schemas.microsoft.com/office/drawing/2014/main" id="{11B4DFE7-985B-4681-83C7-25D04AD451EC}"/>
+              </a:ext>
+            </a:extLst>
+          </p:cNvPr>
+          <p:cNvSpPr txBox="1"/>
+          <p:nvPr/>
+        </p:nvSpPr>
+        <p:spPr>
+          <a:xfrm>
+            <a:off x="9410700" y="4240768"/>
+            <a:ext cx="2749550" cy="646331"/>
+          </a:xfrm>
+          <a:prstGeom prst="rect">
+            <a:avLst/>
+          </a:prstGeom>
+          <a:noFill/>
+        </p:spPr>
+        <p:txBody>
+          <a:bodyPr wrap="square" rtlCol="0">
+            <a:spAutoFit/>
+          </a:bodyPr>
+          <a:lstStyle/>
+          <a:p>
+            <a:r>
+              <a:rPr lang="en-US" dirty="0"/>
+              <a:t>Set r3 to 0, then store to address [</a:t>
+            </a:r>
+            <a:r>
+              <a:rPr lang="en-US" dirty="0" err="1"/>
+              <a:t>fp</a:t>
+            </a:r>
+            <a:r>
+              <a:rPr lang="en-US" dirty="0"/>
+              <a:t>, #-8]</a:t>
+            </a:r>
+            <a:endParaRPr lang="en-CA" dirty="0"/>
+          </a:p>
+        </p:txBody>
+      </p:sp>
+      <p:sp>
+        <p:nvSpPr>
+          <p:cNvPr id="10" name="TextBox 9">
+            <a:extLst>
+              <a:ext uri="{FF2B5EF4-FFF2-40B4-BE49-F238E27FC236}">
+                <a16:creationId xmlns:a16="http://schemas.microsoft.com/office/drawing/2014/main" id="{F96C822F-327C-4A72-A932-20BE03C6B2D7}"/>
+              </a:ext>
+            </a:extLst>
+          </p:cNvPr>
+          <p:cNvSpPr txBox="1"/>
+          <p:nvPr/>
+        </p:nvSpPr>
+        <p:spPr>
+          <a:xfrm>
+            <a:off x="9410700" y="5070366"/>
+            <a:ext cx="2749550" cy="646331"/>
+          </a:xfrm>
+          <a:prstGeom prst="rect">
+            <a:avLst/>
+          </a:prstGeom>
+          <a:noFill/>
+        </p:spPr>
+        <p:txBody>
+          <a:bodyPr wrap="square" rtlCol="0">
+            <a:spAutoFit/>
+          </a:bodyPr>
+          <a:lstStyle/>
+          <a:p>
+            <a:r>
+              <a:rPr lang="en-US" dirty="0"/>
+              <a:t>Load from address [</a:t>
+            </a:r>
+            <a:r>
+              <a:rPr lang="en-US" dirty="0" err="1"/>
+              <a:t>fp</a:t>
+            </a:r>
+            <a:r>
+              <a:rPr lang="en-US" dirty="0"/>
+              <a:t>, #-8] into r3</a:t>
+            </a:r>
+            <a:endParaRPr lang="en-CA" dirty="0"/>
+          </a:p>
+        </p:txBody>
+      </p:sp>
+    </p:spTree>
+    <p:extLst>
+      <p:ext uri="{BB962C8B-B14F-4D97-AF65-F5344CB8AC3E}">
+        <p14:creationId xmlns:p14="http://schemas.microsoft.com/office/powerpoint/2010/main" val="128987553"/>
+      </p:ext>
+    </p:extLst>
+  </p:cSld>
+  <p:clrMapOvr>
+    <a:masterClrMapping/>
+  </p:clrMapOvr>
+</p:sld>
+</file>
+
+<file path=ppt/slides/slide23.xml><?xml version="1.0" encoding="utf-8"?>
+<p:sld xmlns:a="http://schemas.openxmlformats.org/drawingml/2006/main" xmlns:r="http://schemas.openxmlformats.org/officeDocument/2006/relationships" xmlns:p="http://schemas.openxmlformats.org/presentationml/2006/main">
+  <p:cSld>
+    <p:spTree>
+      <p:nvGrpSpPr>
+        <p:cNvPr id="1" name=""/>
+        <p:cNvGrpSpPr/>
+        <p:nvPr/>
+      </p:nvGrpSpPr>
+      <p:grpSpPr>
+        <a:xfrm>
+          <a:off x="0" y="0"/>
+          <a:ext cx="0" cy="0"/>
+          <a:chOff x="0" y="0"/>
+          <a:chExt cx="0" cy="0"/>
+        </a:xfrm>
+      </p:grpSpPr>
+      <p:sp>
+        <p:nvSpPr>
+          <p:cNvPr id="2" name="Title 1">
+            <a:extLst>
+              <a:ext uri="{FF2B5EF4-FFF2-40B4-BE49-F238E27FC236}">
+                <a16:creationId xmlns:a16="http://schemas.microsoft.com/office/drawing/2014/main" id="{836D1D71-FB04-423A-9890-73C90FA4BB4A}"/>
+              </a:ext>
+            </a:extLst>
+          </p:cNvPr>
+          <p:cNvSpPr>
+            <a:spLocks noGrp="1"/>
+          </p:cNvSpPr>
+          <p:nvPr>
+            <p:ph type="title"/>
+          </p:nvPr>
+        </p:nvSpPr>
+        <p:spPr/>
+        <p:txBody>
+          <a:bodyPr/>
+          <a:lstStyle/>
+          <a:p>
+            <a:r>
+              <a:rPr lang="en-US" dirty="0"/>
+              <a:t>Stack vs. Static</a:t>
+            </a:r>
+            <a:endParaRPr lang="en-CA" dirty="0"/>
+          </a:p>
+        </p:txBody>
+      </p:sp>
+      <p:pic>
+        <p:nvPicPr>
+          <p:cNvPr id="4" name="Content Placeholder 3">
+            <a:extLst>
+              <a:ext uri="{FF2B5EF4-FFF2-40B4-BE49-F238E27FC236}">
+                <a16:creationId xmlns:a16="http://schemas.microsoft.com/office/drawing/2014/main" id="{EDE8DD91-FB4E-4E7B-971D-463637D2E1D7}"/>
+              </a:ext>
+            </a:extLst>
+          </p:cNvPr>
+          <p:cNvPicPr>
+            <a:picLocks noGrp="1" noChangeAspect="1"/>
+          </p:cNvPicPr>
+          <p:nvPr>
+            <p:ph idx="1"/>
+          </p:nvPr>
+        </p:nvPicPr>
+        <p:blipFill>
+          <a:blip r:embed="rId2"/>
+          <a:stretch>
+            <a:fillRect/>
+          </a:stretch>
+        </p:blipFill>
+        <p:spPr>
+          <a:xfrm>
+            <a:off x="1066080" y="1349374"/>
+            <a:ext cx="9157420" cy="5325905"/>
+          </a:xfrm>
+          <a:prstGeom prst="rect">
+            <a:avLst/>
+          </a:prstGeom>
+        </p:spPr>
+      </p:pic>
+      <p:sp>
+        <p:nvSpPr>
+          <p:cNvPr id="5" name="Rectangle 4">
+            <a:extLst>
+              <a:ext uri="{FF2B5EF4-FFF2-40B4-BE49-F238E27FC236}">
+                <a16:creationId xmlns:a16="http://schemas.microsoft.com/office/drawing/2014/main" id="{6878C3C3-FEB4-41B8-9A7F-9101D04B611D}"/>
+              </a:ext>
+            </a:extLst>
+          </p:cNvPr>
+          <p:cNvSpPr/>
+          <p:nvPr/>
+        </p:nvSpPr>
+        <p:spPr>
+          <a:xfrm>
+            <a:off x="1695450" y="1690688"/>
+            <a:ext cx="431800" cy="157162"/>
+          </a:xfrm>
+          <a:prstGeom prst="rect">
+            <a:avLst/>
+          </a:prstGeom>
+          <a:noFill/>
+          <a:ln w="38100">
+            <a:solidFill>
+              <a:srgbClr val="FF0000"/>
+            </a:solidFill>
+          </a:ln>
+        </p:spPr>
+        <p:style>
+          <a:lnRef idx="2">
+            <a:schemeClr val="accent1">
+              <a:shade val="50000"/>
+            </a:schemeClr>
+          </a:lnRef>
+          <a:fillRef idx="1">
+            <a:schemeClr val="accent1"/>
+          </a:fillRef>
+          <a:effectRef idx="0">
+            <a:schemeClr val="accent1"/>
+          </a:effectRef>
+          <a:fontRef idx="minor">
+            <a:schemeClr val="lt1"/>
+          </a:fontRef>
+        </p:style>
+        <p:txBody>
+          <a:bodyPr rtlCol="0" anchor="ctr"/>
+          <a:lstStyle/>
+          <a:p>
+            <a:pPr algn="ctr"/>
+            <a:endParaRPr lang="en-CA"/>
+          </a:p>
+        </p:txBody>
+      </p:sp>
+      <p:sp>
+        <p:nvSpPr>
+          <p:cNvPr id="7" name="Rectangle 6">
+            <a:extLst>
+              <a:ext uri="{FF2B5EF4-FFF2-40B4-BE49-F238E27FC236}">
+                <a16:creationId xmlns:a16="http://schemas.microsoft.com/office/drawing/2014/main" id="{9AEF1997-89BA-46C7-BF46-712A83E73D8F}"/>
+              </a:ext>
+            </a:extLst>
+          </p:cNvPr>
+          <p:cNvSpPr/>
+          <p:nvPr/>
+        </p:nvSpPr>
+        <p:spPr>
+          <a:xfrm>
+            <a:off x="7245350" y="3062288"/>
+            <a:ext cx="431800" cy="157162"/>
+          </a:xfrm>
+          <a:prstGeom prst="rect">
+            <a:avLst/>
+          </a:prstGeom>
+          <a:noFill/>
+          <a:ln w="38100">
+            <a:solidFill>
+              <a:srgbClr val="FF0000"/>
+            </a:solidFill>
+          </a:ln>
+        </p:spPr>
+        <p:style>
+          <a:lnRef idx="2">
+            <a:schemeClr val="accent1">
+              <a:shade val="50000"/>
+            </a:schemeClr>
+          </a:lnRef>
+          <a:fillRef idx="1">
+            <a:schemeClr val="accent1"/>
+          </a:fillRef>
+          <a:effectRef idx="0">
+            <a:schemeClr val="accent1"/>
+          </a:effectRef>
+          <a:fontRef idx="minor">
+            <a:schemeClr val="lt1"/>
+          </a:fontRef>
+        </p:style>
+        <p:txBody>
+          <a:bodyPr rtlCol="0" anchor="ctr"/>
+          <a:lstStyle/>
+          <a:p>
+            <a:pPr algn="ctr"/>
+            <a:endParaRPr lang="en-CA"/>
+          </a:p>
+        </p:txBody>
+      </p:sp>
+      <p:sp>
+        <p:nvSpPr>
+          <p:cNvPr id="8" name="TextBox 7">
+            <a:extLst>
+              <a:ext uri="{FF2B5EF4-FFF2-40B4-BE49-F238E27FC236}">
+                <a16:creationId xmlns:a16="http://schemas.microsoft.com/office/drawing/2014/main" id="{BA74BB79-8ABA-4C2C-A105-049A3373E98B}"/>
+              </a:ext>
+            </a:extLst>
+          </p:cNvPr>
+          <p:cNvSpPr txBox="1"/>
+          <p:nvPr/>
+        </p:nvSpPr>
+        <p:spPr>
+          <a:xfrm>
+            <a:off x="9804400" y="2851834"/>
+            <a:ext cx="2387600" cy="923330"/>
+          </a:xfrm>
+          <a:prstGeom prst="rect">
+            <a:avLst/>
+          </a:prstGeom>
+          <a:noFill/>
+        </p:spPr>
+        <p:txBody>
+          <a:bodyPr wrap="square" rtlCol="0">
+            <a:spAutoFit/>
+          </a:bodyPr>
+          <a:lstStyle/>
+          <a:p>
+            <a:r>
+              <a:rPr lang="en-US" dirty="0"/>
+              <a:t>Define variable static -&gt; now stored at some </a:t>
+            </a:r>
+            <a:r>
+              <a:rPr lang="en-US" b="1" u="sng" dirty="0"/>
+              <a:t>specific location</a:t>
+            </a:r>
+            <a:r>
+              <a:rPr lang="en-US" dirty="0"/>
+              <a:t>.</a:t>
+            </a:r>
+            <a:endParaRPr lang="en-CA" dirty="0"/>
+          </a:p>
+        </p:txBody>
+      </p:sp>
+    </p:spTree>
+    <p:extLst>
+      <p:ext uri="{BB962C8B-B14F-4D97-AF65-F5344CB8AC3E}">
+        <p14:creationId xmlns:p14="http://schemas.microsoft.com/office/powerpoint/2010/main" val="2199526502"/>
+      </p:ext>
+    </p:extLst>
+  </p:cSld>
+  <p:clrMapOvr>
+    <a:masterClrMapping/>
+  </p:clrMapOvr>
+</p:sld>
+</file>
+
+<file path=ppt/slides/slide24.xml><?xml version="1.0" encoding="utf-8"?>
+<p:sld xmlns:a="http://schemas.openxmlformats.org/drawingml/2006/main" xmlns:r="http://schemas.openxmlformats.org/officeDocument/2006/relationships" xmlns:p="http://schemas.openxmlformats.org/presentationml/2006/main">
+  <p:cSld>
+    <p:spTree>
+      <p:nvGrpSpPr>
+        <p:cNvPr id="1" name=""/>
+        <p:cNvGrpSpPr/>
+        <p:nvPr/>
+      </p:nvGrpSpPr>
+      <p:grpSpPr>
+        <a:xfrm>
+          <a:off x="0" y="0"/>
+          <a:ext cx="0" cy="0"/>
+          <a:chOff x="0" y="0"/>
+          <a:chExt cx="0" cy="0"/>
+        </a:xfrm>
+      </p:grpSpPr>
+      <p:sp>
+        <p:nvSpPr>
+          <p:cNvPr id="2" name="Title 1">
+            <a:extLst>
+              <a:ext uri="{FF2B5EF4-FFF2-40B4-BE49-F238E27FC236}">
+                <a16:creationId xmlns:a16="http://schemas.microsoft.com/office/drawing/2014/main" id="{8639E604-E175-47D5-A8CB-CF60836FAB12}"/>
+              </a:ext>
+            </a:extLst>
+          </p:cNvPr>
+          <p:cNvSpPr>
+            <a:spLocks noGrp="1"/>
+          </p:cNvSpPr>
+          <p:nvPr>
+            <p:ph type="title"/>
+          </p:nvPr>
+        </p:nvSpPr>
+        <p:spPr/>
+        <p:txBody>
+          <a:bodyPr/>
+          <a:lstStyle/>
+          <a:p>
+            <a:r>
+              <a:rPr lang="en-US" dirty="0"/>
+              <a:t>What was this [</a:t>
+            </a:r>
+            <a:r>
+              <a:rPr lang="en-US" dirty="0" err="1"/>
+              <a:t>fp</a:t>
+            </a:r>
+            <a:r>
+              <a:rPr lang="en-US" dirty="0"/>
+              <a:t>, #-8] thingy?</a:t>
+            </a:r>
+            <a:endParaRPr lang="en-CA" dirty="0"/>
+          </a:p>
+        </p:txBody>
+      </p:sp>
+      <p:pic>
+        <p:nvPicPr>
+          <p:cNvPr id="5" name="Picture 4">
+            <a:extLst>
+              <a:ext uri="{FF2B5EF4-FFF2-40B4-BE49-F238E27FC236}">
+                <a16:creationId xmlns:a16="http://schemas.microsoft.com/office/drawing/2014/main" id="{40FDEA74-A9B1-45D7-8C61-A3957120E4AE}"/>
+              </a:ext>
+            </a:extLst>
+          </p:cNvPr>
+          <p:cNvPicPr>
+            <a:picLocks noChangeAspect="1"/>
+          </p:cNvPicPr>
+          <p:nvPr/>
+        </p:nvPicPr>
+        <p:blipFill>
+          <a:blip r:embed="rId2"/>
+          <a:stretch>
+            <a:fillRect/>
+          </a:stretch>
+        </p:blipFill>
+        <p:spPr>
+          <a:xfrm>
+            <a:off x="1301372" y="2385816"/>
+            <a:ext cx="5410955" cy="2810267"/>
+          </a:xfrm>
+          <a:prstGeom prst="rect">
+            <a:avLst/>
+          </a:prstGeom>
+        </p:spPr>
+      </p:pic>
+      <p:cxnSp>
+        <p:nvCxnSpPr>
+          <p:cNvPr id="7" name="Straight Arrow Connector 6">
+            <a:extLst>
+              <a:ext uri="{FF2B5EF4-FFF2-40B4-BE49-F238E27FC236}">
+                <a16:creationId xmlns:a16="http://schemas.microsoft.com/office/drawing/2014/main" id="{0464303E-EF67-40C8-A658-636EAAB5B2C3}"/>
+              </a:ext>
+            </a:extLst>
+          </p:cNvPr>
+          <p:cNvCxnSpPr/>
+          <p:nvPr/>
+        </p:nvCxnSpPr>
+        <p:spPr>
+          <a:xfrm flipV="1">
+            <a:off x="4260850" y="2190750"/>
+            <a:ext cx="2978150" cy="1117600"/>
+          </a:xfrm>
+          <a:prstGeom prst="straightConnector1">
+            <a:avLst/>
+          </a:prstGeom>
+          <a:ln>
+            <a:tailEnd type="triangle"/>
+          </a:ln>
+        </p:spPr>
+        <p:style>
+          <a:lnRef idx="1">
+            <a:schemeClr val="accent1"/>
+          </a:lnRef>
+          <a:fillRef idx="0">
+            <a:schemeClr val="accent1"/>
+          </a:fillRef>
+          <a:effectRef idx="0">
+            <a:schemeClr val="accent1"/>
+          </a:effectRef>
+          <a:fontRef idx="minor">
+            <a:schemeClr val="tx1"/>
+          </a:fontRef>
+        </p:style>
+      </p:cxnSp>
+      <p:sp>
+        <p:nvSpPr>
+          <p:cNvPr id="8" name="TextBox 7">
+            <a:extLst>
+              <a:ext uri="{FF2B5EF4-FFF2-40B4-BE49-F238E27FC236}">
+                <a16:creationId xmlns:a16="http://schemas.microsoft.com/office/drawing/2014/main" id="{0F5F051E-A228-43D8-893B-766840C1AD31}"/>
+              </a:ext>
+            </a:extLst>
+          </p:cNvPr>
+          <p:cNvSpPr txBox="1"/>
+          <p:nvPr/>
+        </p:nvSpPr>
+        <p:spPr>
+          <a:xfrm>
+            <a:off x="7239000" y="1993900"/>
+            <a:ext cx="4546600" cy="369332"/>
+          </a:xfrm>
+          <a:prstGeom prst="rect">
+            <a:avLst/>
+          </a:prstGeom>
+          <a:noFill/>
+        </p:spPr>
+        <p:txBody>
+          <a:bodyPr wrap="square" rtlCol="0">
+            <a:spAutoFit/>
+          </a:bodyPr>
+          <a:lstStyle/>
+          <a:p>
+            <a:r>
+              <a:rPr lang="en-US" dirty="0" err="1"/>
+              <a:t>fp</a:t>
+            </a:r>
+            <a:r>
+              <a:rPr lang="en-US" dirty="0"/>
+              <a:t> = “Frame Pointer”</a:t>
+            </a:r>
+            <a:endParaRPr lang="en-CA" dirty="0"/>
+          </a:p>
+        </p:txBody>
+      </p:sp>
+      <p:pic>
+        <p:nvPicPr>
+          <p:cNvPr id="1026" name="Picture 2" descr="Stack-based memory allocation - Wikipedia">
+            <a:extLst>
+              <a:ext uri="{FF2B5EF4-FFF2-40B4-BE49-F238E27FC236}">
+                <a16:creationId xmlns:a16="http://schemas.microsoft.com/office/drawing/2014/main" id="{68E0458A-5783-4CDF-8F4F-E456839FC433}"/>
+              </a:ext>
+            </a:extLst>
+          </p:cNvPr>
+          <p:cNvPicPr>
+            <a:picLocks noChangeAspect="1" noChangeArrowheads="1"/>
+          </p:cNvPicPr>
+          <p:nvPr/>
+        </p:nvPicPr>
+        <p:blipFill>
+          <a:blip r:embed="rId3">
+            <a:extLst>
+              <a:ext uri="{28A0092B-C50C-407E-A947-70E740481C1C}">
+                <a14:useLocalDpi xmlns:a14="http://schemas.microsoft.com/office/drawing/2010/main" val="0"/>
+              </a:ext>
+            </a:extLst>
+          </a:blip>
+          <a:srcRect/>
+          <a:stretch>
+            <a:fillRect/>
+          </a:stretch>
+        </p:blipFill>
+        <p:spPr bwMode="auto">
+          <a:xfrm>
+            <a:off x="7016750" y="2385816"/>
+            <a:ext cx="3336925" cy="3963574"/>
+          </a:xfrm>
+          <a:prstGeom prst="rect">
+            <a:avLst/>
+          </a:prstGeom>
+          <a:noFill/>
+          <a:extLst>
+            <a:ext uri="{909E8E84-426E-40DD-AFC4-6F175D3DCCD1}">
+              <a14:hiddenFill xmlns:a14="http://schemas.microsoft.com/office/drawing/2010/main">
+                <a:solidFill>
+                  <a:srgbClr val="FFFFFF"/>
+                </a:solidFill>
+              </a14:hiddenFill>
+            </a:ext>
+          </a:extLst>
+        </p:spPr>
+      </p:pic>
+    </p:spTree>
+    <p:extLst>
+      <p:ext uri="{BB962C8B-B14F-4D97-AF65-F5344CB8AC3E}">
+        <p14:creationId xmlns:p14="http://schemas.microsoft.com/office/powerpoint/2010/main" val="3717492973"/>
+      </p:ext>
+    </p:extLst>
+  </p:cSld>
+  <p:clrMapOvr>
+    <a:masterClrMapping/>
+  </p:clrMapOvr>
+  <p:timing>
+    <p:tnLst>
+      <p:par>
+        <p:cTn id="1" dur="indefinite" restart="never" nodeType="tmRoot">
+          <p:childTnLst>
+            <p:seq concurrent="1" nextAc="seek">
+              <p:cTn id="2" dur="indefinite" nodeType="mainSeq">
+                <p:childTnLst>
+                  <p:par>
+                    <p:cTn id="3" fill="hold">
+                      <p:stCondLst>
+                        <p:cond delay="indefinite"/>
+                      </p:stCondLst>
+                      <p:childTnLst>
+                        <p:par>
+                          <p:cTn id="4" fill="hold">
+                            <p:stCondLst>
+                              <p:cond delay="0"/>
+                            </p:stCondLst>
+                            <p:childTnLst>
+                              <p:par>
+                                <p:cTn id="5" presetID="1" presetClass="entr" presetSubtype="0" fill="hold" nodeType="clickEffect">
+                                  <p:stCondLst>
+                                    <p:cond delay="0"/>
+                                  </p:stCondLst>
+                                  <p:childTnLst>
+                                    <p:set>
+                                      <p:cBhvr>
+                                        <p:cTn id="6" dur="1" fill="hold">
+                                          <p:stCondLst>
+                                            <p:cond delay="0"/>
+                                          </p:stCondLst>
+                                        </p:cTn>
+                                        <p:tgtEl>
+                                          <p:spTgt spid="1026"/>
+                                        </p:tgtEl>
+                                        <p:attrNameLst>
+                                          <p:attrName>style.visibility</p:attrName>
+                                        </p:attrNameLst>
+                                      </p:cBhvr>
+                                      <p:to>
+                                        <p:strVal val="visible"/>
+                                      </p:to>
+                                    </p:set>
+                                  </p:childTnLst>
+                                </p:cTn>
+                              </p:par>
+                            </p:childTnLst>
+                          </p:cTn>
+                        </p:par>
+                      </p:childTnLst>
+                    </p:cTn>
+                  </p:par>
+                </p:childTnLst>
+              </p:cTn>
+              <p:prevCondLst>
+                <p:cond evt="onPrev" delay="0">
+                  <p:tgtEl>
+                    <p:sldTgt/>
+                  </p:tgtEl>
+                </p:cond>
+              </p:prevCondLst>
+              <p:nextCondLst>
+                <p:cond evt="onNext" delay="0">
+                  <p:tgtEl>
+                    <p:sldTgt/>
+                  </p:tgtEl>
+                </p:cond>
+              </p:nextCondLst>
+            </p:seq>
+          </p:childTnLst>
+        </p:cTn>
+      </p:par>
+    </p:tnLst>
+  </p:timing>
+</p:sld>
+</file>
+
+<file path=ppt/slides/slide25.xml><?xml version="1.0" encoding="utf-8"?>
+<p:sld xmlns:a="http://schemas.openxmlformats.org/drawingml/2006/main" xmlns:r="http://schemas.openxmlformats.org/officeDocument/2006/relationships" xmlns:p="http://schemas.openxmlformats.org/presentationml/2006/main">
+  <p:cSld>
+    <p:spTree>
+      <p:nvGrpSpPr>
+        <p:cNvPr id="1" name=""/>
+        <p:cNvGrpSpPr/>
+        <p:nvPr/>
+      </p:nvGrpSpPr>
+      <p:grpSpPr>
+        <a:xfrm>
+          <a:off x="0" y="0"/>
+          <a:ext cx="0" cy="0"/>
+          <a:chOff x="0" y="0"/>
+          <a:chExt cx="0" cy="0"/>
+        </a:xfrm>
+      </p:grpSpPr>
+      <p:sp>
+        <p:nvSpPr>
+          <p:cNvPr id="2" name="Title 1">
+            <a:extLst>
+              <a:ext uri="{FF2B5EF4-FFF2-40B4-BE49-F238E27FC236}">
+                <a16:creationId xmlns:a16="http://schemas.microsoft.com/office/drawing/2014/main" id="{DC2D6CE9-79A1-4C7B-911F-BC9581BD493B}"/>
+              </a:ext>
+            </a:extLst>
+          </p:cNvPr>
+          <p:cNvSpPr>
+            <a:spLocks noGrp="1"/>
+          </p:cNvSpPr>
+          <p:nvPr>
+            <p:ph type="title"/>
+          </p:nvPr>
+        </p:nvSpPr>
+        <p:spPr/>
+        <p:txBody>
+          <a:bodyPr/>
+          <a:lstStyle/>
+          <a:p>
+            <a:r>
+              <a:rPr lang="en-US" dirty="0"/>
+              <a:t>Variables in Functions</a:t>
+            </a:r>
+            <a:endParaRPr lang="en-CA" dirty="0"/>
+          </a:p>
+        </p:txBody>
+      </p:sp>
+      <p:sp>
+        <p:nvSpPr>
+          <p:cNvPr id="3" name="Content Placeholder 2">
+            <a:extLst>
+              <a:ext uri="{FF2B5EF4-FFF2-40B4-BE49-F238E27FC236}">
+                <a16:creationId xmlns:a16="http://schemas.microsoft.com/office/drawing/2014/main" id="{75C204F4-3A84-4798-ACDC-B56AC8194910}"/>
+              </a:ext>
+            </a:extLst>
+          </p:cNvPr>
+          <p:cNvSpPr>
+            <a:spLocks noGrp="1"/>
+          </p:cNvSpPr>
+          <p:nvPr>
+            <p:ph idx="1"/>
+          </p:nvPr>
+        </p:nvSpPr>
+        <p:spPr/>
+        <p:txBody>
+          <a:bodyPr/>
+          <a:lstStyle/>
+          <a:p>
+            <a:r>
+              <a:rPr lang="en-US" dirty="0"/>
+              <a:t>CPU only functions on registers.</a:t>
+            </a:r>
+          </a:p>
+          <a:p>
+            <a:r>
+              <a:rPr lang="en-US" dirty="0"/>
+              <a:t>When tracking </a:t>
+            </a:r>
+            <a:r>
+              <a:rPr lang="en-US" i="1" dirty="0"/>
+              <a:t>where</a:t>
+            </a:r>
+            <a:r>
+              <a:rPr lang="en-US" dirty="0"/>
+              <a:t> in memory things are stored – may need to look back a little to see if load/store happens.</a:t>
+            </a:r>
+          </a:p>
+          <a:p>
+            <a:endParaRPr lang="en-US" dirty="0"/>
+          </a:p>
+          <a:p>
+            <a:r>
+              <a:rPr lang="en-US" dirty="0"/>
+              <a:t>Local variables are stored on the stack frame – this will be reused in other functions.</a:t>
+            </a:r>
+          </a:p>
+          <a:p>
+            <a:endParaRPr lang="en-US" dirty="0"/>
+          </a:p>
+          <a:p>
+            <a:r>
+              <a:rPr lang="en-US" dirty="0"/>
+              <a:t>Global or static variables are stored at a specific location in memory (and never re-used).</a:t>
+            </a:r>
+            <a:endParaRPr lang="en-CA" dirty="0"/>
+          </a:p>
+        </p:txBody>
+      </p:sp>
+    </p:spTree>
+    <p:extLst>
+      <p:ext uri="{BB962C8B-B14F-4D97-AF65-F5344CB8AC3E}">
+        <p14:creationId xmlns:p14="http://schemas.microsoft.com/office/powerpoint/2010/main" val="1317245531"/>
+      </p:ext>
+    </p:extLst>
+  </p:cSld>
+  <p:clrMapOvr>
+    <a:masterClrMapping/>
+  </p:clrMapOvr>
+</p:sld>
+</file>
+
+<file path=ppt/slides/slide26.xml><?xml version="1.0" encoding="utf-8"?>
+<p:sld xmlns:a="http://schemas.openxmlformats.org/drawingml/2006/main" xmlns:r="http://schemas.openxmlformats.org/officeDocument/2006/relationships" xmlns:p="http://schemas.openxmlformats.org/presentationml/2006/main">
+  <p:cSld>
+    <p:spTree>
+      <p:nvGrpSpPr>
+        <p:cNvPr id="1" name=""/>
+        <p:cNvGrpSpPr/>
+        <p:nvPr/>
+      </p:nvGrpSpPr>
+      <p:grpSpPr>
+        <a:xfrm>
+          <a:off x="0" y="0"/>
+          <a:ext cx="0" cy="0"/>
+          <a:chOff x="0" y="0"/>
+          <a:chExt cx="0" cy="0"/>
+        </a:xfrm>
+      </p:grpSpPr>
+      <p:sp>
+        <p:nvSpPr>
+          <p:cNvPr id="2" name="Title 1">
+            <a:extLst>
+              <a:ext uri="{FF2B5EF4-FFF2-40B4-BE49-F238E27FC236}">
+                <a16:creationId xmlns:a16="http://schemas.microsoft.com/office/drawing/2014/main" id="{8F2336BD-030A-0617-1B64-1C09DC274009}"/>
+              </a:ext>
+            </a:extLst>
+          </p:cNvPr>
+          <p:cNvSpPr>
+            <a:spLocks noGrp="1"/>
+          </p:cNvSpPr>
+          <p:nvPr>
+            <p:ph type="title"/>
+          </p:nvPr>
+        </p:nvSpPr>
+        <p:spPr/>
+        <p:txBody>
+          <a:bodyPr/>
+          <a:lstStyle/>
+          <a:p>
+            <a:r>
+              <a:rPr lang="en-CA" dirty="0"/>
+              <a:t>Summary – SW Reversing</a:t>
+            </a:r>
+          </a:p>
+        </p:txBody>
+      </p:sp>
+      <p:sp>
+        <p:nvSpPr>
+          <p:cNvPr id="3" name="Content Placeholder 2">
+            <a:extLst>
+              <a:ext uri="{FF2B5EF4-FFF2-40B4-BE49-F238E27FC236}">
+                <a16:creationId xmlns:a16="http://schemas.microsoft.com/office/drawing/2014/main" id="{AEB75680-5E91-2984-E7CF-8D3865B786E3}"/>
+              </a:ext>
+            </a:extLst>
+          </p:cNvPr>
+          <p:cNvSpPr>
+            <a:spLocks noGrp="1"/>
+          </p:cNvSpPr>
+          <p:nvPr>
+            <p:ph idx="1"/>
+          </p:nvPr>
+        </p:nvSpPr>
+        <p:spPr/>
+        <p:txBody>
+          <a:bodyPr/>
+          <a:lstStyle/>
+          <a:p>
+            <a:r>
+              <a:rPr lang="en-CA" dirty="0"/>
+              <a:t>These slides </a:t>
+            </a:r>
+            <a:r>
+              <a:rPr lang="en-CA" i="1" dirty="0"/>
+              <a:t>should</a:t>
+            </a:r>
+            <a:r>
+              <a:rPr lang="en-CA" dirty="0"/>
+              <a:t> have been mostly a refresher on computer architecture topics.</a:t>
+            </a:r>
+          </a:p>
+          <a:p>
+            <a:endParaRPr lang="en-CA" dirty="0"/>
+          </a:p>
+          <a:p>
+            <a:r>
+              <a:rPr lang="en-CA" dirty="0"/>
+              <a:t>We’ll use Compiler Explorer to observe how C/ASM mapping works (later we need to do the </a:t>
+            </a:r>
+            <a:r>
+              <a:rPr lang="en-CA" i="1" dirty="0"/>
+              <a:t>reverse</a:t>
+            </a:r>
+            <a:r>
+              <a:rPr lang="en-CA" dirty="0"/>
+              <a:t>, where we only have ASM).</a:t>
+            </a:r>
+          </a:p>
+          <a:p>
+            <a:endParaRPr lang="en-CA" dirty="0"/>
+          </a:p>
+          <a:p>
+            <a:r>
+              <a:rPr lang="en-CA" dirty="0"/>
+              <a:t>Next we’ll explore what a “binary” exactly consists of…</a:t>
+            </a:r>
+          </a:p>
+        </p:txBody>
+      </p:sp>
+    </p:spTree>
+    <p:extLst>
+      <p:ext uri="{BB962C8B-B14F-4D97-AF65-F5344CB8AC3E}">
+        <p14:creationId xmlns:p14="http://schemas.microsoft.com/office/powerpoint/2010/main" val="3481720211"/>
       </p:ext>
     </p:extLst>
   </p:cSld>
@@ -3969,7 +7361,7 @@
           <a:p>
             <a:r>
               <a:rPr lang="en-US" dirty="0"/>
-              <a:t>What is reverse engineering (this quicky lecture).</a:t>
+              <a:t>What is reverse engineering</a:t>
             </a:r>
           </a:p>
           <a:p>
@@ -4023,6 +7415,436 @@
     <p:extLst>
       <p:ext uri="{BB962C8B-B14F-4D97-AF65-F5344CB8AC3E}">
         <p14:creationId xmlns:p14="http://schemas.microsoft.com/office/powerpoint/2010/main" val="3271066159"/>
+      </p:ext>
+    </p:extLst>
+  </p:cSld>
+  <p:clrMapOvr>
+    <a:masterClrMapping/>
+  </p:clrMapOvr>
+</p:sld>
+</file>
+
+<file path=ppt/slides/slide6.xml><?xml version="1.0" encoding="utf-8"?>
+<p:sld xmlns:a="http://schemas.openxmlformats.org/drawingml/2006/main" xmlns:r="http://schemas.openxmlformats.org/officeDocument/2006/relationships" xmlns:p="http://schemas.openxmlformats.org/presentationml/2006/main">
+  <p:cSld>
+    <p:spTree>
+      <p:nvGrpSpPr>
+        <p:cNvPr id="1" name=""/>
+        <p:cNvGrpSpPr/>
+        <p:nvPr/>
+      </p:nvGrpSpPr>
+      <p:grpSpPr>
+        <a:xfrm>
+          <a:off x="0" y="0"/>
+          <a:ext cx="0" cy="0"/>
+          <a:chOff x="0" y="0"/>
+          <a:chExt cx="0" cy="0"/>
+        </a:xfrm>
+      </p:grpSpPr>
+      <p:sp>
+        <p:nvSpPr>
+          <p:cNvPr id="2" name="Title 1">
+            <a:extLst>
+              <a:ext uri="{FF2B5EF4-FFF2-40B4-BE49-F238E27FC236}">
+                <a16:creationId xmlns:a16="http://schemas.microsoft.com/office/drawing/2014/main" id="{C5EECA7E-51EB-43D3-B480-B3ACCB4A4C4A}"/>
+              </a:ext>
+            </a:extLst>
+          </p:cNvPr>
+          <p:cNvSpPr>
+            <a:spLocks noGrp="1"/>
+          </p:cNvSpPr>
+          <p:nvPr>
+            <p:ph type="title"/>
+          </p:nvPr>
+        </p:nvSpPr>
+        <p:spPr/>
+        <p:txBody>
+          <a:bodyPr/>
+          <a:lstStyle/>
+          <a:p>
+            <a:r>
+              <a:rPr lang="en-US" dirty="0"/>
+              <a:t>Using Compiler Explorer</a:t>
+            </a:r>
+            <a:endParaRPr lang="en-CA" dirty="0"/>
+          </a:p>
+        </p:txBody>
+      </p:sp>
+      <p:sp>
+        <p:nvSpPr>
+          <p:cNvPr id="3" name="Content Placeholder 2">
+            <a:extLst>
+              <a:ext uri="{FF2B5EF4-FFF2-40B4-BE49-F238E27FC236}">
+                <a16:creationId xmlns:a16="http://schemas.microsoft.com/office/drawing/2014/main" id="{7B91A23E-F639-472E-9BD5-095C60166C75}"/>
+              </a:ext>
+            </a:extLst>
+          </p:cNvPr>
+          <p:cNvSpPr>
+            <a:spLocks noGrp="1"/>
+          </p:cNvSpPr>
+          <p:nvPr>
+            <p:ph idx="1"/>
+          </p:nvPr>
+        </p:nvSpPr>
+        <p:spPr/>
+        <p:txBody>
+          <a:bodyPr/>
+          <a:lstStyle/>
+          <a:p>
+            <a:r>
+              <a:rPr lang="en-US" dirty="0"/>
+              <a:t>Available online at Godbolt.org (made by Matt Godbolt)</a:t>
+            </a:r>
+            <a:endParaRPr lang="en-CA" dirty="0"/>
+          </a:p>
+        </p:txBody>
+      </p:sp>
+      <p:pic>
+        <p:nvPicPr>
+          <p:cNvPr id="4" name="Picture 3">
+            <a:extLst>
+              <a:ext uri="{FF2B5EF4-FFF2-40B4-BE49-F238E27FC236}">
+                <a16:creationId xmlns:a16="http://schemas.microsoft.com/office/drawing/2014/main" id="{C6D4037A-6FF2-4A4C-9E54-09B14031F92A}"/>
+              </a:ext>
+            </a:extLst>
+          </p:cNvPr>
+          <p:cNvPicPr>
+            <a:picLocks noChangeAspect="1"/>
+          </p:cNvPicPr>
+          <p:nvPr/>
+        </p:nvPicPr>
+        <p:blipFill>
+          <a:blip r:embed="rId2"/>
+          <a:stretch>
+            <a:fillRect/>
+          </a:stretch>
+        </p:blipFill>
+        <p:spPr>
+          <a:xfrm>
+            <a:off x="1345580" y="2632975"/>
+            <a:ext cx="8958146" cy="3859900"/>
+          </a:xfrm>
+          <a:prstGeom prst="rect">
+            <a:avLst/>
+          </a:prstGeom>
+        </p:spPr>
+      </p:pic>
+    </p:spTree>
+    <p:extLst>
+      <p:ext uri="{BB962C8B-B14F-4D97-AF65-F5344CB8AC3E}">
+        <p14:creationId xmlns:p14="http://schemas.microsoft.com/office/powerpoint/2010/main" val="2279848998"/>
+      </p:ext>
+    </p:extLst>
+  </p:cSld>
+  <p:clrMapOvr>
+    <a:masterClrMapping/>
+  </p:clrMapOvr>
+</p:sld>
+</file>
+
+<file path=ppt/slides/slide7.xml><?xml version="1.0" encoding="utf-8"?>
+<p:sld xmlns:a="http://schemas.openxmlformats.org/drawingml/2006/main" xmlns:r="http://schemas.openxmlformats.org/officeDocument/2006/relationships" xmlns:p="http://schemas.openxmlformats.org/presentationml/2006/main">
+  <p:cSld>
+    <p:spTree>
+      <p:nvGrpSpPr>
+        <p:cNvPr id="1" name=""/>
+        <p:cNvGrpSpPr/>
+        <p:nvPr/>
+      </p:nvGrpSpPr>
+      <p:grpSpPr>
+        <a:xfrm>
+          <a:off x="0" y="0"/>
+          <a:ext cx="0" cy="0"/>
+          <a:chOff x="0" y="0"/>
+          <a:chExt cx="0" cy="0"/>
+        </a:xfrm>
+      </p:grpSpPr>
+      <p:sp>
+        <p:nvSpPr>
+          <p:cNvPr id="2" name="Title 1">
+            <a:extLst>
+              <a:ext uri="{FF2B5EF4-FFF2-40B4-BE49-F238E27FC236}">
+                <a16:creationId xmlns:a16="http://schemas.microsoft.com/office/drawing/2014/main" id="{4DB6884E-E359-4E00-B066-4044A8EBF2F4}"/>
+              </a:ext>
+            </a:extLst>
+          </p:cNvPr>
+          <p:cNvSpPr>
+            <a:spLocks noGrp="1"/>
+          </p:cNvSpPr>
+          <p:nvPr>
+            <p:ph type="title"/>
+          </p:nvPr>
+        </p:nvSpPr>
+        <p:spPr/>
+        <p:txBody>
+          <a:bodyPr/>
+          <a:lstStyle/>
+          <a:p>
+            <a:r>
+              <a:rPr lang="en-US" dirty="0"/>
+              <a:t>Set the compiler type</a:t>
+            </a:r>
+            <a:endParaRPr lang="en-CA" dirty="0"/>
+          </a:p>
+        </p:txBody>
+      </p:sp>
+      <p:pic>
+        <p:nvPicPr>
+          <p:cNvPr id="4" name="Content Placeholder 3">
+            <a:extLst>
+              <a:ext uri="{FF2B5EF4-FFF2-40B4-BE49-F238E27FC236}">
+                <a16:creationId xmlns:a16="http://schemas.microsoft.com/office/drawing/2014/main" id="{9D8AD4F5-27EF-448A-BB5F-3DB9A43F10ED}"/>
+              </a:ext>
+            </a:extLst>
+          </p:cNvPr>
+          <p:cNvPicPr>
+            <a:picLocks noGrp="1" noChangeAspect="1"/>
+          </p:cNvPicPr>
+          <p:nvPr>
+            <p:ph idx="1"/>
+          </p:nvPr>
+        </p:nvPicPr>
+        <p:blipFill>
+          <a:blip r:embed="rId2"/>
+          <a:stretch>
+            <a:fillRect/>
+          </a:stretch>
+        </p:blipFill>
+        <p:spPr>
+          <a:xfrm>
+            <a:off x="505272" y="2283522"/>
+            <a:ext cx="5249008" cy="1933845"/>
+          </a:xfrm>
+          <a:prstGeom prst="rect">
+            <a:avLst/>
+          </a:prstGeom>
+        </p:spPr>
+      </p:pic>
+      <p:pic>
+        <p:nvPicPr>
+          <p:cNvPr id="5" name="Picture 4">
+            <a:extLst>
+              <a:ext uri="{FF2B5EF4-FFF2-40B4-BE49-F238E27FC236}">
+                <a16:creationId xmlns:a16="http://schemas.microsoft.com/office/drawing/2014/main" id="{9096DDDE-3101-4937-8C73-C1F3C693FA5F}"/>
+              </a:ext>
+            </a:extLst>
+          </p:cNvPr>
+          <p:cNvPicPr>
+            <a:picLocks noChangeAspect="1"/>
+          </p:cNvPicPr>
+          <p:nvPr/>
+        </p:nvPicPr>
+        <p:blipFill>
+          <a:blip r:embed="rId3"/>
+          <a:stretch>
+            <a:fillRect/>
+          </a:stretch>
+        </p:blipFill>
+        <p:spPr>
+          <a:xfrm>
+            <a:off x="6268824" y="2283522"/>
+            <a:ext cx="5558638" cy="1933845"/>
+          </a:xfrm>
+          <a:prstGeom prst="rect">
+            <a:avLst/>
+          </a:prstGeom>
+        </p:spPr>
+      </p:pic>
+    </p:spTree>
+    <p:extLst>
+      <p:ext uri="{BB962C8B-B14F-4D97-AF65-F5344CB8AC3E}">
+        <p14:creationId xmlns:p14="http://schemas.microsoft.com/office/powerpoint/2010/main" val="1702857347"/>
+      </p:ext>
+    </p:extLst>
+  </p:cSld>
+  <p:clrMapOvr>
+    <a:masterClrMapping/>
+  </p:clrMapOvr>
+</p:sld>
+</file>
+
+<file path=ppt/slides/slide8.xml><?xml version="1.0" encoding="utf-8"?>
+<p:sld xmlns:a="http://schemas.openxmlformats.org/drawingml/2006/main" xmlns:r="http://schemas.openxmlformats.org/officeDocument/2006/relationships" xmlns:p="http://schemas.openxmlformats.org/presentationml/2006/main">
+  <p:cSld>
+    <p:spTree>
+      <p:nvGrpSpPr>
+        <p:cNvPr id="1" name=""/>
+        <p:cNvGrpSpPr/>
+        <p:nvPr/>
+      </p:nvGrpSpPr>
+      <p:grpSpPr>
+        <a:xfrm>
+          <a:off x="0" y="0"/>
+          <a:ext cx="0" cy="0"/>
+          <a:chOff x="0" y="0"/>
+          <a:chExt cx="0" cy="0"/>
+        </a:xfrm>
+      </p:grpSpPr>
+      <p:sp>
+        <p:nvSpPr>
+          <p:cNvPr id="2" name="Title 1">
+            <a:extLst>
+              <a:ext uri="{FF2B5EF4-FFF2-40B4-BE49-F238E27FC236}">
+                <a16:creationId xmlns:a16="http://schemas.microsoft.com/office/drawing/2014/main" id="{05B0369B-4E89-4E28-982F-E36F916C7658}"/>
+              </a:ext>
+            </a:extLst>
+          </p:cNvPr>
+          <p:cNvSpPr>
+            <a:spLocks noGrp="1"/>
+          </p:cNvSpPr>
+          <p:nvPr>
+            <p:ph type="title"/>
+          </p:nvPr>
+        </p:nvSpPr>
+        <p:spPr/>
+        <p:txBody>
+          <a:bodyPr/>
+          <a:lstStyle/>
+          <a:p>
+            <a:r>
+              <a:rPr lang="en-US" dirty="0"/>
+              <a:t>Default Example Code</a:t>
+            </a:r>
+            <a:endParaRPr lang="en-CA" dirty="0"/>
+          </a:p>
+        </p:txBody>
+      </p:sp>
+      <p:pic>
+        <p:nvPicPr>
+          <p:cNvPr id="4" name="Content Placeholder 3">
+            <a:extLst>
+              <a:ext uri="{FF2B5EF4-FFF2-40B4-BE49-F238E27FC236}">
+                <a16:creationId xmlns:a16="http://schemas.microsoft.com/office/drawing/2014/main" id="{8C9055AB-69A4-4238-B650-6101A21E954E}"/>
+              </a:ext>
+            </a:extLst>
+          </p:cNvPr>
+          <p:cNvPicPr>
+            <a:picLocks noGrp="1" noChangeAspect="1"/>
+          </p:cNvPicPr>
+          <p:nvPr>
+            <p:ph idx="1"/>
+          </p:nvPr>
+        </p:nvPicPr>
+        <p:blipFill>
+          <a:blip r:embed="rId2"/>
+          <a:stretch>
+            <a:fillRect/>
+          </a:stretch>
+        </p:blipFill>
+        <p:spPr>
+          <a:xfrm>
+            <a:off x="1339366" y="1825625"/>
+            <a:ext cx="9513268" cy="4351338"/>
+          </a:xfrm>
+          <a:prstGeom prst="rect">
+            <a:avLst/>
+          </a:prstGeom>
+        </p:spPr>
+      </p:pic>
+    </p:spTree>
+    <p:extLst>
+      <p:ext uri="{BB962C8B-B14F-4D97-AF65-F5344CB8AC3E}">
+        <p14:creationId xmlns:p14="http://schemas.microsoft.com/office/powerpoint/2010/main" val="315966856"/>
+      </p:ext>
+    </p:extLst>
+  </p:cSld>
+  <p:clrMapOvr>
+    <a:masterClrMapping/>
+  </p:clrMapOvr>
+</p:sld>
+</file>
+
+<file path=ppt/slides/slide9.xml><?xml version="1.0" encoding="utf-8"?>
+<p:sld xmlns:a="http://schemas.openxmlformats.org/drawingml/2006/main" xmlns:r="http://schemas.openxmlformats.org/officeDocument/2006/relationships" xmlns:p="http://schemas.openxmlformats.org/presentationml/2006/main">
+  <p:cSld>
+    <p:spTree>
+      <p:nvGrpSpPr>
+        <p:cNvPr id="1" name=""/>
+        <p:cNvGrpSpPr/>
+        <p:nvPr/>
+      </p:nvGrpSpPr>
+      <p:grpSpPr>
+        <a:xfrm>
+          <a:off x="0" y="0"/>
+          <a:ext cx="0" cy="0"/>
+          <a:chOff x="0" y="0"/>
+          <a:chExt cx="0" cy="0"/>
+        </a:xfrm>
+      </p:grpSpPr>
+      <p:sp>
+        <p:nvSpPr>
+          <p:cNvPr id="2" name="Title 1">
+            <a:extLst>
+              <a:ext uri="{FF2B5EF4-FFF2-40B4-BE49-F238E27FC236}">
+                <a16:creationId xmlns:a16="http://schemas.microsoft.com/office/drawing/2014/main" id="{CBC9CB7F-7384-4DF6-8FB8-325F5B482AD7}"/>
+              </a:ext>
+            </a:extLst>
+          </p:cNvPr>
+          <p:cNvSpPr>
+            <a:spLocks noGrp="1"/>
+          </p:cNvSpPr>
+          <p:nvPr>
+            <p:ph type="title"/>
+          </p:nvPr>
+        </p:nvSpPr>
+        <p:spPr/>
+        <p:txBody>
+          <a:bodyPr/>
+          <a:lstStyle/>
+          <a:p>
+            <a:r>
+              <a:rPr lang="en-US" dirty="0"/>
+              <a:t>How does it work?</a:t>
+            </a:r>
+            <a:endParaRPr lang="en-CA" dirty="0"/>
+          </a:p>
+        </p:txBody>
+      </p:sp>
+      <p:sp>
+        <p:nvSpPr>
+          <p:cNvPr id="3" name="Content Placeholder 2">
+            <a:extLst>
+              <a:ext uri="{FF2B5EF4-FFF2-40B4-BE49-F238E27FC236}">
+                <a16:creationId xmlns:a16="http://schemas.microsoft.com/office/drawing/2014/main" id="{D3649350-A659-416F-8289-B865EEACFDB3}"/>
+              </a:ext>
+            </a:extLst>
+          </p:cNvPr>
+          <p:cNvSpPr>
+            <a:spLocks noGrp="1"/>
+          </p:cNvSpPr>
+          <p:nvPr>
+            <p:ph idx="1"/>
+          </p:nvPr>
+        </p:nvSpPr>
+        <p:spPr/>
+        <p:txBody>
+          <a:bodyPr/>
+          <a:lstStyle/>
+          <a:p>
+            <a:r>
+              <a:rPr lang="en-US" dirty="0"/>
+              <a:t>Compiles C code on left to ASM on right.</a:t>
+            </a:r>
+          </a:p>
+          <a:p>
+            <a:r>
+              <a:rPr lang="en-US" dirty="0"/>
+              <a:t>Applies optimizations – if your code does nothing it may get optimized away (just like in real life).</a:t>
+            </a:r>
+          </a:p>
+          <a:p>
+            <a:r>
+              <a:rPr lang="en-US" dirty="0"/>
+              <a:t>You can call external functions, the assembly for them won’t show up.</a:t>
+            </a:r>
+            <a:endParaRPr lang="en-CA" dirty="0"/>
+          </a:p>
+        </p:txBody>
+      </p:sp>
+    </p:spTree>
+    <p:extLst>
+      <p:ext uri="{BB962C8B-B14F-4D97-AF65-F5344CB8AC3E}">
+        <p14:creationId xmlns:p14="http://schemas.microsoft.com/office/powerpoint/2010/main" val="3259110822"/>
       </p:ext>
     </p:extLst>
   </p:cSld>
